--- a/Guia_Usuario_Gestion_Activos_Fijos.pptx
+++ b/Guia_Usuario_Gestion_Activos_Fijos.pptx
@@ -5,24 +5,24 @@
     <p:sldMasterId id="2147483660" r:id="rId4"/>
   </p:sldMasterIdLst>
   <p:notesMasterIdLst>
-    <p:notesMasterId r:id="rId17"/>
+    <p:notesMasterId r:id="rId20"/>
   </p:notesMasterIdLst>
   <p:sldIdLst>
-    <p:sldId id="273" r:id="rId7"/>
-    <p:sldId id="266" r:id="rId11"/>
-    <p:sldId id="262" r:id="rId10"/>
-    <p:sldId id="269" r:id="rId12"/>
+    <p:sldId id="273" r:id="rId5"/>
+    <p:sldId id="266" r:id="rId6"/>
+    <p:sldId id="262" r:id="rId7"/>
+    <p:sldId id="269" r:id="rId8"/>
     <p:sldId id="265" r:id="rId9"/>
-    <p:sldId id="271" r:id="rId8"/>
-    <p:sldId id="275" r:id="rId23"/>
-    <p:sldId id="276" r:id="rId24"/>
-    <p:sldId id="277" r:id="rId28"/>
-    <p:sldId id="280" r:id="rId29"/>
-    <p:sldId id="278" r:id="rId26"/>
-    <p:sldId id="279" r:id="rId27"/>
-    <p:sldId id="268" r:id="rId14"/>
-    <p:sldId id="270" r:id="rId13"/>
-    <p:sldId id="258" r:id="rId16"/>
+    <p:sldId id="271" r:id="rId10"/>
+    <p:sldId id="275" r:id="rId11"/>
+    <p:sldId id="276" r:id="rId12"/>
+    <p:sldId id="277" r:id="rId13"/>
+    <p:sldId id="280" r:id="rId14"/>
+    <p:sldId id="278" r:id="rId15"/>
+    <p:sldId id="279" r:id="rId16"/>
+    <p:sldId id="268" r:id="rId17"/>
+    <p:sldId id="270" r:id="rId18"/>
+    <p:sldId id="258" r:id="rId19"/>
   </p:sldIdLst>
   <p:sldSz cx="12192000" cy="6858000"/>
   <p:notesSz cx="6858000" cy="9144000"/>
@@ -126,21 +126,24 @@
       <p14:sectionLst xmlns:p14="http://schemas.microsoft.com/office/powerpoint/2010/main">
         <p14:section name="Portada" id="{31F34B79-A36D-4A71-BCDC-6561A521C36D}">
           <p14:sldIdLst>
-            <p14:sldId id="274"/>
-            <p14:sldId id="272"/>
             <p14:sldId id="273"/>
           </p14:sldIdLst>
         </p14:section>
         <p14:section name="Sección predeterminada" id="{C8EFEA8A-5D49-464C-899E-14541AEBFB17}">
           <p14:sldIdLst>
+            <p14:sldId id="266"/>
+            <p14:sldId id="262"/>
+            <p14:sldId id="269"/>
+            <p14:sldId id="265"/>
             <p14:sldId id="271"/>
-            <p14:sldId id="265"/>
-            <p14:sldId id="262"/>
-            <p14:sldId id="266"/>
-            <p14:sldId id="269"/>
+            <p14:sldId id="275"/>
+            <p14:sldId id="276"/>
+            <p14:sldId id="277"/>
+            <p14:sldId id="280"/>
+            <p14:sldId id="278"/>
+            <p14:sldId id="279"/>
+            <p14:sldId id="268"/>
             <p14:sldId id="270"/>
-            <p14:sldId id="268"/>
-            <p14:sldId id="267"/>
             <p14:sldId id="258"/>
           </p14:sldIdLst>
         </p14:section>
@@ -279,7 +282,7 @@
           <a:p>
             <a:fld id="{129EC3A0-C2C2-3A4C-ACDF-C83251AEDF6D}" type="datetimeFigureOut">
               <a:rPr lang="es-ES_tradnl" smtClean="0"/>
-              <a:t>09/04/2026</a:t>
+              <a:t>18/06/2026</a:t>
             </a:fld>
             <a:endParaRPr lang="es-ES_tradnl"/>
           </a:p>
@@ -3291,7 +3294,7 @@
                   <a:schemeClr val="bg1"/>
                 </a:solidFill>
               </a:rPr>
-              <a:t xml:space="preserve">+57 (604) 325 2400 </a:t>
+              <a:t>+57 (604) 325 2400 </a:t>
             </a:r>
           </a:p>
           <a:p>
@@ -6575,7 +6578,885 @@
 </p:sldMaster>
 </file>
 
+<file path=ppt/slides/slide1.xml><?xml version="1.0" encoding="utf-8"?>
+<p:sld xmlns:a="http://schemas.openxmlformats.org/drawingml/2006/main" xmlns:r="http://schemas.openxmlformats.org/officeDocument/2006/relationships" xmlns:p="http://schemas.openxmlformats.org/presentationml/2006/main">
+  <p:cSld>
+    <p:spTree>
+      <p:nvGrpSpPr>
+        <p:cNvPr id="1" name="">
+          <a:extLst>
+            <a:ext uri="{FF2B5EF4-FFF2-40B4-BE49-F238E27FC236}">
+              <a16:creationId xmlns:a16="http://schemas.microsoft.com/office/drawing/2014/main" id="{BFBEEA20-501C-CA4D-B024-ACD67457C873}"/>
+            </a:ext>
+          </a:extLst>
+        </p:cNvPr>
+        <p:cNvGrpSpPr/>
+        <p:nvPr/>
+      </p:nvGrpSpPr>
+      <p:grpSpPr>
+        <a:xfrm>
+          <a:off x="0" y="0"/>
+          <a:ext cx="0" cy="0"/>
+          <a:chOff x="0" y="0"/>
+          <a:chExt cx="0" cy="0"/>
+        </a:xfrm>
+      </p:grpSpPr>
+      <p:pic>
+        <p:nvPicPr>
+          <p:cNvPr id="15" name="Imagen 14" descr="Una persona con los brazos extendidos  El contenido generado por IA puede ser incorrecto.">
+            <a:extLst>
+              <a:ext uri="{FF2B5EF4-FFF2-40B4-BE49-F238E27FC236}">
+                <a16:creationId xmlns:a16="http://schemas.microsoft.com/office/drawing/2014/main" id="{1B01B6F3-162D-F862-E092-2E3E1579C3A9}"/>
+              </a:ext>
+            </a:extLst>
+          </p:cNvPr>
+          <p:cNvPicPr>
+            <a:picLocks noChangeAspect="1"/>
+          </p:cNvPicPr>
+          <p:nvPr/>
+        </p:nvPicPr>
+        <p:blipFill>
+          <a:blip r:embed="rId2"/>
+          <a:stretch>
+            <a:fillRect/>
+          </a:stretch>
+        </p:blipFill>
+        <p:spPr>
+          <a:xfrm>
+            <a:off x="0" y="0"/>
+            <a:ext cx="12191999" cy="6858000"/>
+          </a:xfrm>
+          <a:prstGeom prst="rect">
+            <a:avLst/>
+          </a:prstGeom>
+        </p:spPr>
+      </p:pic>
+      <p:pic>
+        <p:nvPicPr>
+          <p:cNvPr id="12" name="Imagen 11" descr="Logotipo  El contenido generado por IA puede ser incorrecto.">
+            <a:extLst>
+              <a:ext uri="{FF2B5EF4-FFF2-40B4-BE49-F238E27FC236}">
+                <a16:creationId xmlns:a16="http://schemas.microsoft.com/office/drawing/2014/main" id="{9057F3FA-B26D-9645-B946-56A8A57917C7}"/>
+              </a:ext>
+            </a:extLst>
+          </p:cNvPr>
+          <p:cNvPicPr>
+            <a:picLocks noChangeAspect="1"/>
+          </p:cNvPicPr>
+          <p:nvPr/>
+        </p:nvPicPr>
+        <p:blipFill>
+          <a:blip r:embed="rId3"/>
+          <a:stretch>
+            <a:fillRect/>
+          </a:stretch>
+        </p:blipFill>
+        <p:spPr>
+          <a:xfrm>
+            <a:off x="9380587" y="110082"/>
+            <a:ext cx="2749444" cy="1593881"/>
+          </a:xfrm>
+          <a:prstGeom prst="rect">
+            <a:avLst/>
+          </a:prstGeom>
+        </p:spPr>
+      </p:pic>
+      <p:sp>
+        <p:nvSpPr>
+          <p:cNvPr id="13" name="Título 1">
+            <a:extLst>
+              <a:ext uri="{FF2B5EF4-FFF2-40B4-BE49-F238E27FC236}">
+                <a16:creationId xmlns:a16="http://schemas.microsoft.com/office/drawing/2014/main" id="{C735EE70-BAB2-57BF-0EF8-DA2EB852106C}"/>
+              </a:ext>
+            </a:extLst>
+          </p:cNvPr>
+          <p:cNvSpPr txBox="1">
+            <a:spLocks/>
+          </p:cNvSpPr>
+          <p:nvPr/>
+        </p:nvSpPr>
+        <p:spPr>
+          <a:xfrm>
+            <a:off x="5300000" y="3450000"/>
+            <a:ext cx="6450000" cy="1950000"/>
+          </a:xfrm>
+          <a:prstGeom prst="rect">
+            <a:avLst/>
+          </a:prstGeom>
+        </p:spPr>
+        <p:txBody>
+          <a:bodyPr vert="horz" lIns="91440" tIns="45720" rIns="91440" bIns="45720" rtlCol="0" anchor="ctr" anchorCtr="0">
+            <a:noAutofit/>
+          </a:bodyPr>
+          <a:lstStyle/>
+          <a:p>
+            <a:pPr marL="0" indent="0">
+              <a:buNone/>
+            </a:pPr>
+            <a:r>
+              <a:rPr lang="es-CO" sz="6000">
+                <a:solidFill>
+                  <a:srgbClr val="FFFFFF"/>
+                </a:solidFill>
+                <a:latin typeface="Bariol" panose="02000506040000020003" pitchFamily="50" charset="0"/>
+              </a:rPr>
+              <a:t>Gestión de Activos Fijos</a:t>
+            </a:r>
+          </a:p>
+          <a:p>
+            <a:pPr marL="0" indent="0">
+              <a:spcBef>
+                <a:spcPts val="600"/>
+              </a:spcBef>
+              <a:buNone/>
+            </a:pPr>
+            <a:r>
+              <a:rPr lang="es-CO" sz="2000">
+                <a:solidFill>
+                  <a:srgbClr val="FFFFFF"/>
+                </a:solidFill>
+                <a:latin typeface="Bariol" panose="02000506040000020003" pitchFamily="50" charset="0"/>
+              </a:rPr>
+              <a:t>Guía de uso para el usuario</a:t>
+            </a:r>
+          </a:p>
+        </p:txBody>
+      </p:sp>
+    </p:spTree>
+    <p:extLst>
+      <p:ext uri="{BB962C8B-B14F-4D97-AF65-F5344CB8AC3E}">
+        <p14:creationId xmlns:p14="http://schemas.microsoft.com/office/powerpoint/2010/main" val="3136919188"/>
+      </p:ext>
+    </p:extLst>
+  </p:cSld>
+  <p:clrMapOvr>
+    <a:masterClrMapping/>
+  </p:clrMapOvr>
+  <mc:AlternateContent xmlns:mc="http://schemas.openxmlformats.org/markup-compatibility/2006" xmlns:p14="http://schemas.microsoft.com/office/powerpoint/2010/main">
+    <mc:Choice Requires="p14">
+      <p:transition p14:dur="350">
+        <p:fade/>
+      </p:transition>
+    </mc:Choice>
+    <mc:Fallback xmlns="">
+      <p:transition>
+        <p:fade/>
+      </p:transition>
+    </mc:Fallback>
+  </mc:AlternateContent>
+</p:sld>
+</file>
+
 <file path=ppt/slides/slide10.xml><?xml version="1.0" encoding="utf-8"?>
+<p:sld xmlns:a="http://schemas.openxmlformats.org/drawingml/2006/main" xmlns:r="http://schemas.openxmlformats.org/officeDocument/2006/relationships" xmlns:p="http://schemas.openxmlformats.org/presentationml/2006/main">
+  <p:cSld>
+    <p:spTree>
+      <p:nvGrpSpPr>
+        <p:cNvPr id="1" name=""/>
+        <p:cNvGrpSpPr/>
+        <p:nvPr/>
+      </p:nvGrpSpPr>
+      <p:grpSpPr>
+        <a:xfrm>
+          <a:off x="0" y="0"/>
+          <a:ext cx="0" cy="0"/>
+          <a:chOff x="0" y="0"/>
+          <a:chExt cx="0" cy="0"/>
+        </a:xfrm>
+      </p:grpSpPr>
+      <p:sp>
+        <p:nvSpPr>
+          <p:cNvPr id="2" name="Marcador de número de diapositiva 1">
+            <a:extLst>
+              <a:ext uri="{FF2B5EF4-FFF2-40B4-BE49-F238E27FC236}">
+                <a16:creationId xmlns:a16="http://schemas.microsoft.com/office/drawing/2014/main" id="{DEA09B1E-6BAE-95BB-0BBF-123CF2C891BA}"/>
+              </a:ext>
+            </a:extLst>
+          </p:cNvPr>
+          <p:cNvSpPr>
+            <a:spLocks noGrp="1"/>
+          </p:cNvSpPr>
+          <p:nvPr>
+            <p:ph type="sldNum" sz="quarter" idx="4"/>
+          </p:nvPr>
+        </p:nvSpPr>
+        <p:spPr/>
+        <p:txBody>
+          <a:bodyPr/>
+          <a:lstStyle/>
+          <a:p>
+            <a:fld id="{F6EB29E3-579C-284A-BB93-B47AD62E130B}" type="slidenum">
+              <a:rPr lang="es-ES_tradnl" smtClean="0"/>
+              <a:pPr/>
+              <a:t>10</a:t>
+            </a:fld>
+            <a:endParaRPr lang="es-ES_tradnl" sz="1000"/>
+          </a:p>
+        </p:txBody>
+      </p:sp>
+      <p:pic>
+        <p:nvPicPr>
+          <p:cNvPr id="8" name="Imagen 7" descr="Imagen que contiene Icono  El contenido generado por IA puede ser incorrecto.">
+            <a:extLst>
+              <a:ext uri="{FF2B5EF4-FFF2-40B4-BE49-F238E27FC236}">
+                <a16:creationId xmlns:a16="http://schemas.microsoft.com/office/drawing/2014/main" id="{FD870812-987C-D46A-56A5-567719FA0FBA}"/>
+              </a:ext>
+            </a:extLst>
+          </p:cNvPr>
+          <p:cNvPicPr>
+            <a:picLocks noChangeAspect="1"/>
+          </p:cNvPicPr>
+          <p:nvPr/>
+        </p:nvPicPr>
+        <p:blipFill>
+          <a:blip r:embed="rId2"/>
+          <a:stretch>
+            <a:fillRect/>
+          </a:stretch>
+        </p:blipFill>
+        <p:spPr>
+          <a:xfrm>
+            <a:off x="1" y="0"/>
+            <a:ext cx="12191999" cy="6858000"/>
+          </a:xfrm>
+          <a:prstGeom prst="rect">
+            <a:avLst/>
+          </a:prstGeom>
+        </p:spPr>
+      </p:pic>
+      <p:pic>
+        <p:nvPicPr>
+          <p:cNvPr id="9" name="Imagen 8" descr="Logotipo  El contenido generado por IA puede ser incorrecto.">
+            <a:extLst>
+              <a:ext uri="{FF2B5EF4-FFF2-40B4-BE49-F238E27FC236}">
+                <a16:creationId xmlns:a16="http://schemas.microsoft.com/office/drawing/2014/main" id="{6948155E-6163-E469-7243-84A46C29CF3C}"/>
+              </a:ext>
+            </a:extLst>
+          </p:cNvPr>
+          <p:cNvPicPr>
+            <a:picLocks noChangeAspect="1"/>
+          </p:cNvPicPr>
+          <p:nvPr/>
+        </p:nvPicPr>
+        <p:blipFill>
+          <a:blip r:embed="rId3"/>
+          <a:stretch>
+            <a:fillRect/>
+          </a:stretch>
+        </p:blipFill>
+        <p:spPr>
+          <a:xfrm>
+            <a:off x="10804414" y="333378"/>
+            <a:ext cx="1053147" cy="610520"/>
+          </a:xfrm>
+          <a:prstGeom prst="rect">
+            <a:avLst/>
+          </a:prstGeom>
+        </p:spPr>
+      </p:pic>
+      <p:sp>
+        <p:nvSpPr>
+          <p:cNvPr id="3" name="Título 1">
+            <a:extLst>
+              <a:ext uri="{FF2B5EF4-FFF2-40B4-BE49-F238E27FC236}">
+                <a16:creationId xmlns:a16="http://schemas.microsoft.com/office/drawing/2014/main" id="{AD0FC757-D97E-0DF1-ED2B-AE9100758E79}"/>
+              </a:ext>
+            </a:extLst>
+          </p:cNvPr>
+          <p:cNvSpPr>
+            <a:spLocks noGrp="1"/>
+          </p:cNvSpPr>
+          <p:nvPr>
+            <p:ph type="title"/>
+          </p:nvPr>
+        </p:nvSpPr>
+        <p:spPr>
+          <a:xfrm>
+            <a:off x="4670617" y="-482471"/>
+            <a:ext cx="7000000" cy="2852737"/>
+          </a:xfrm>
+        </p:spPr>
+        <p:txBody>
+          <a:bodyPr/>
+          <a:lstStyle/>
+          <a:p>
+            <a:pPr marL="0" indent="0">
+              <a:buNone/>
+            </a:pPr>
+            <a:r>
+              <a:rPr lang="es-CO" sz="3200">
+                <a:solidFill>
+                  <a:schemeClr val="bg1"/>
+                </a:solidFill>
+                <a:latin typeface="Bariol" panose="02000506040000020003" pitchFamily="50" charset="0"/>
+              </a:rPr>
+              <a:t>Paso 4 · Subir los anexos</a:t>
+            </a:r>
+          </a:p>
+        </p:txBody>
+      </p:sp>
+      <p:sp>
+        <p:nvSpPr>
+          <p:cNvPr id="5" name="Subtítulo 2">
+            <a:extLst>
+              <a:ext uri="{FF2B5EF4-FFF2-40B4-BE49-F238E27FC236}">
+                <a16:creationId xmlns:a16="http://schemas.microsoft.com/office/drawing/2014/main" id="{909C0CE7-C067-0659-3393-EE588C294EF6}"/>
+              </a:ext>
+            </a:extLst>
+          </p:cNvPr>
+          <p:cNvSpPr txBox="1">
+            <a:spLocks/>
+          </p:cNvSpPr>
+          <p:nvPr/>
+        </p:nvSpPr>
+        <p:spPr>
+          <a:xfrm>
+            <a:off x="4670617" y="2476783"/>
+            <a:ext cx="7146172" cy="4100000"/>
+          </a:xfrm>
+          <a:prstGeom prst="rect">
+            <a:avLst/>
+          </a:prstGeom>
+        </p:spPr>
+        <p:txBody>
+          <a:bodyPr>
+            <a:normAutofit/>
+          </a:bodyPr>
+          <a:lstStyle/>
+          <a:p>
+            <a:pPr marL="0" indent="0">
+              <a:buNone/>
+            </a:pPr>
+            <a:r>
+              <a:rPr lang="es-CO">
+                <a:solidFill>
+                  <a:schemeClr val="bg1"/>
+                </a:solidFill>
+              </a:rPr>
+              <a:t>Pulsa Subir Anexos, elige la sociedad y selecciona los documentos que quieres adjuntar.</a:t>
+            </a:r>
+          </a:p>
+          <a:p>
+            <a:pPr marL="0" indent="0">
+              <a:spcBef>
+                <a:spcPts val="600"/>
+              </a:spcBef>
+              <a:buNone/>
+            </a:pPr>
+            <a:r>
+              <a:rPr lang="es-CO">
+                <a:solidFill>
+                  <a:schemeClr val="bg1"/>
+                </a:solidFill>
+              </a:rPr>
+              <a:t>La aplicación toma el listado de activos creados y adjunta cada documento a cada activo en SAP, uno por uno.</a:t>
+            </a:r>
+          </a:p>
+          <a:p>
+            <a:pPr marL="0" indent="0">
+              <a:spcBef>
+                <a:spcPts val="600"/>
+              </a:spcBef>
+              <a:buNone/>
+            </a:pPr>
+            <a:r>
+              <a:rPr lang="es-CO">
+                <a:solidFill>
+                  <a:schemeClr val="bg1"/>
+                </a:solidFill>
+              </a:rPr>
+              <a:t>Si hay muchos activos el proceso es largo: déjalo trabajar sin interrupciones.</a:t>
+            </a:r>
+          </a:p>
+          <a:p>
+            <a:pPr marL="0" indent="0">
+              <a:spcBef>
+                <a:spcPts val="600"/>
+              </a:spcBef>
+              <a:buNone/>
+            </a:pPr>
+            <a:r>
+              <a:rPr lang="es-CO" b="1">
+                <a:solidFill>
+                  <a:schemeClr val="bg1"/>
+                </a:solidFill>
+              </a:rPr>
+              <a:t>Al final verás un resumen de cuántos se subieron correctamente.</a:t>
+            </a:r>
+          </a:p>
+        </p:txBody>
+      </p:sp>
+    </p:spTree>
+    <p:extLst>
+      <p:ext uri="{BB962C8B-B14F-4D97-AF65-F5344CB8AC3E}">
+        <p14:creationId xmlns:p14="http://schemas.microsoft.com/office/powerpoint/2010/main" val="590287769"/>
+      </p:ext>
+    </p:extLst>
+  </p:cSld>
+  <p:clrMapOvr>
+    <a:masterClrMapping/>
+  </p:clrMapOvr>
+  <mc:AlternateContent xmlns:mc="http://schemas.openxmlformats.org/markup-compatibility/2006" xmlns:p14="http://schemas.microsoft.com/office/powerpoint/2010/main">
+    <mc:Choice Requires="p14">
+      <p:transition p14:dur="350">
+        <p:fade/>
+      </p:transition>
+    </mc:Choice>
+    <mc:Fallback xmlns="">
+      <p:transition>
+        <p:fade/>
+      </p:transition>
+    </mc:Fallback>
+  </mc:AlternateContent>
+</p:sld>
+</file>
+
+<file path=ppt/slides/slide11.xml><?xml version="1.0" encoding="utf-8"?>
+<p:sld xmlns:a="http://schemas.openxmlformats.org/drawingml/2006/main" xmlns:r="http://schemas.openxmlformats.org/officeDocument/2006/relationships" xmlns:p="http://schemas.openxmlformats.org/presentationml/2006/main">
+  <p:cSld>
+    <p:spTree>
+      <p:nvGrpSpPr>
+        <p:cNvPr id="1" name=""/>
+        <p:cNvGrpSpPr/>
+        <p:nvPr/>
+      </p:nvGrpSpPr>
+      <p:grpSpPr>
+        <a:xfrm>
+          <a:off x="0" y="0"/>
+          <a:ext cx="0" cy="0"/>
+          <a:chOff x="0" y="0"/>
+          <a:chExt cx="0" cy="0"/>
+        </a:xfrm>
+      </p:grpSpPr>
+      <p:sp>
+        <p:nvSpPr>
+          <p:cNvPr id="2" name="Título 1">
+            <a:extLst>
+              <a:ext uri="{FF2B5EF4-FFF2-40B4-BE49-F238E27FC236}">
+                <a16:creationId xmlns:a16="http://schemas.microsoft.com/office/drawing/2014/main" id="{8E015669-66ED-D51F-0B8F-226AFFBCF523}"/>
+              </a:ext>
+            </a:extLst>
+          </p:cNvPr>
+          <p:cNvSpPr>
+            <a:spLocks noGrp="1"/>
+          </p:cNvSpPr>
+          <p:nvPr>
+            <p:ph type="title"/>
+          </p:nvPr>
+        </p:nvSpPr>
+        <p:spPr/>
+        <p:txBody>
+          <a:bodyPr/>
+          <a:lstStyle/>
+          <a:p>
+            <a:pPr marL="0" indent="0">
+              <a:buNone/>
+            </a:pPr>
+            <a:r>
+              <a:rPr lang="es-CO">
+                <a:latin typeface="Bariol" panose="02000506040000020003" pitchFamily="50" charset="0"/>
+              </a:rPr>
+              <a:t>Control SOX</a:t>
+            </a:r>
+          </a:p>
+        </p:txBody>
+      </p:sp>
+      <p:sp>
+        <p:nvSpPr>
+          <p:cNvPr id="3" name="Marcador de texto 2">
+            <a:extLst>
+              <a:ext uri="{FF2B5EF4-FFF2-40B4-BE49-F238E27FC236}">
+                <a16:creationId xmlns:a16="http://schemas.microsoft.com/office/drawing/2014/main" id="{42CAB150-398A-0BEF-B691-BF9A66542303}"/>
+              </a:ext>
+            </a:extLst>
+          </p:cNvPr>
+          <p:cNvSpPr>
+            <a:spLocks noGrp="1"/>
+          </p:cNvSpPr>
+          <p:nvPr>
+            <p:ph type="body" idx="1"/>
+          </p:nvPr>
+        </p:nvSpPr>
+        <p:spPr/>
+        <p:txBody>
+          <a:bodyPr/>
+          <a:lstStyle/>
+          <a:p>
+            <a:pPr marL="0" indent="0">
+              <a:buNone/>
+            </a:pPr>
+            <a:r>
+              <a:rPr lang="es-CO"/>
+              <a:t>Genera el reporte de control de activos con todas sus evidencias, listo para auditoría.</a:t>
+            </a:r>
+          </a:p>
+        </p:txBody>
+      </p:sp>
+      <p:sp>
+        <p:nvSpPr>
+          <p:cNvPr id="4" name="Marcador de texto 3">
+            <a:extLst>
+              <a:ext uri="{FF2B5EF4-FFF2-40B4-BE49-F238E27FC236}">
+                <a16:creationId xmlns:a16="http://schemas.microsoft.com/office/drawing/2014/main" id="{A48A5407-45D9-3659-5333-5E8867BC1B6A}"/>
+              </a:ext>
+            </a:extLst>
+          </p:cNvPr>
+          <p:cNvSpPr>
+            <a:spLocks noGrp="1"/>
+          </p:cNvSpPr>
+          <p:nvPr>
+            <p:ph type="body" sz="quarter" idx="10"/>
+          </p:nvPr>
+        </p:nvSpPr>
+        <p:spPr/>
+        <p:txBody>
+          <a:bodyPr/>
+          <a:lstStyle/>
+          <a:p>
+            <a:pPr marL="0" indent="0">
+              <a:buNone/>
+            </a:pPr>
+            <a:r>
+              <a:rPr lang="es-CO">
+                <a:latin typeface="Bariol" panose="02000506040000020003" pitchFamily="50" charset="0"/>
+              </a:rPr>
+              <a:t>2</a:t>
+            </a:r>
+          </a:p>
+        </p:txBody>
+      </p:sp>
+    </p:spTree>
+    <p:extLst>
+      <p:ext uri="{BB962C8B-B14F-4D97-AF65-F5344CB8AC3E}">
+        <p14:creationId xmlns:p14="http://schemas.microsoft.com/office/powerpoint/2010/main" val="623546703"/>
+      </p:ext>
+    </p:extLst>
+  </p:cSld>
+  <p:clrMapOvr>
+    <a:masterClrMapping/>
+  </p:clrMapOvr>
+  <mc:AlternateContent xmlns:mc="http://schemas.openxmlformats.org/markup-compatibility/2006" xmlns:p14="http://schemas.microsoft.com/office/powerpoint/2010/main">
+    <mc:Choice Requires="p14">
+      <p:transition p14:dur="350">
+        <p:fade/>
+      </p:transition>
+    </mc:Choice>
+    <mc:Fallback xmlns="">
+      <p:transition>
+        <p:fade/>
+      </p:transition>
+    </mc:Fallback>
+  </mc:AlternateContent>
+</p:sld>
+</file>
+
+<file path=ppt/slides/slide12.xml><?xml version="1.0" encoding="utf-8"?>
+<p:sld xmlns:a="http://schemas.openxmlformats.org/drawingml/2006/main" xmlns:r="http://schemas.openxmlformats.org/officeDocument/2006/relationships" xmlns:p="http://schemas.openxmlformats.org/presentationml/2006/main">
+  <p:cSld>
+    <p:spTree>
+      <p:nvGrpSpPr>
+        <p:cNvPr id="1" name="">
+          <a:extLst>
+            <a:ext uri="{FF2B5EF4-FFF2-40B4-BE49-F238E27FC236}">
+              <a16:creationId xmlns:a16="http://schemas.microsoft.com/office/drawing/2014/main" id="{1A689B8B-7DDE-8534-B66D-13E2691DEE8A}"/>
+            </a:ext>
+          </a:extLst>
+        </p:cNvPr>
+        <p:cNvGrpSpPr/>
+        <p:nvPr/>
+      </p:nvGrpSpPr>
+      <p:grpSpPr>
+        <a:xfrm>
+          <a:off x="0" y="0"/>
+          <a:ext cx="0" cy="0"/>
+          <a:chOff x="0" y="0"/>
+          <a:chExt cx="0" cy="0"/>
+        </a:xfrm>
+      </p:grpSpPr>
+      <p:sp>
+        <p:nvSpPr>
+          <p:cNvPr id="5" name="Título 4">
+            <a:extLst>
+              <a:ext uri="{FF2B5EF4-FFF2-40B4-BE49-F238E27FC236}">
+                <a16:creationId xmlns:a16="http://schemas.microsoft.com/office/drawing/2014/main" id="{716A16E2-6542-47AB-CB5A-AA1A42C8F968}"/>
+              </a:ext>
+            </a:extLst>
+          </p:cNvPr>
+          <p:cNvSpPr>
+            <a:spLocks noGrp="1"/>
+          </p:cNvSpPr>
+          <p:nvPr>
+            <p:ph type="title"/>
+          </p:nvPr>
+        </p:nvSpPr>
+        <p:spPr/>
+        <p:txBody>
+          <a:bodyPr/>
+          <a:lstStyle/>
+          <a:p>
+            <a:pPr marL="0" indent="0">
+              <a:buNone/>
+            </a:pPr>
+            <a:r>
+              <a:rPr lang="es-CO">
+                <a:latin typeface="Bariol" panose="02000506040000020003" pitchFamily="50" charset="0"/>
+              </a:rPr>
+              <a:t>Generar el Reporte SOX</a:t>
+            </a:r>
+          </a:p>
+        </p:txBody>
+      </p:sp>
+      <p:sp>
+        <p:nvSpPr>
+          <p:cNvPr id="6" name="Marcador de contenido 5">
+            <a:extLst>
+              <a:ext uri="{FF2B5EF4-FFF2-40B4-BE49-F238E27FC236}">
+                <a16:creationId xmlns:a16="http://schemas.microsoft.com/office/drawing/2014/main" id="{CC548DBE-0DFE-E86D-5A1F-A784E6CA2790}"/>
+              </a:ext>
+            </a:extLst>
+          </p:cNvPr>
+          <p:cNvSpPr>
+            <a:spLocks noGrp="1"/>
+          </p:cNvSpPr>
+          <p:nvPr>
+            <p:ph type="body" sz="quarter" idx="4294967295"/>
+          </p:nvPr>
+        </p:nvSpPr>
+        <p:spPr>
+          <a:xfrm>
+            <a:off x="514350" y="1600000"/>
+            <a:ext cx="5650000" cy="4950000"/>
+          </a:xfrm>
+        </p:spPr>
+        <p:txBody>
+          <a:bodyPr>
+            <a:normAutofit/>
+          </a:bodyPr>
+          <a:lstStyle/>
+          <a:p>
+            <a:pPr marL="0" indent="0">
+              <a:spcBef>
+                <a:spcPts val="600"/>
+              </a:spcBef>
+              <a:buNone/>
+            </a:pPr>
+            <a:r>
+              <a:rPr lang="es-CO" sz="1800" b="1"/>
+              <a:t>Cómo generarlo</a:t>
+            </a:r>
+          </a:p>
+          <a:p>
+            <a:pPr marL="357188" indent="-357188">
+              <a:spcBef>
+                <a:spcPts val="600"/>
+              </a:spcBef>
+              <a:buFont typeface="+mj-lt"/>
+              <a:buAutoNum type="arabicPeriod"/>
+            </a:pPr>
+            <a:r>
+              <a:rPr lang="es-CO" sz="1500"/>
+              <a:t>Entra a Control SOX y luego a HUB.PPE.01 Creación de Activos Fijos.</a:t>
+            </a:r>
+          </a:p>
+          <a:p>
+            <a:pPr marL="357188" indent="-357188">
+              <a:spcBef>
+                <a:spcPts val="600"/>
+              </a:spcBef>
+              <a:buFont typeface="+mj-lt"/>
+              <a:buAutoNum type="arabicPeriod"/>
+            </a:pPr>
+            <a:r>
+              <a:rPr lang="es-CO" sz="1500"/>
+              <a:t>Elige la sociedad y las fechas Desde y Hasta.</a:t>
+            </a:r>
+          </a:p>
+          <a:p>
+            <a:pPr marL="357188" indent="-357188">
+              <a:spcBef>
+                <a:spcPts val="600"/>
+              </a:spcBef>
+              <a:buFont typeface="+mj-lt"/>
+              <a:buAutoNum type="arabicPeriod"/>
+            </a:pPr>
+            <a:r>
+              <a:rPr lang="es-CO" sz="1500"/>
+              <a:t>Pulsa Generar Reporte SOX.</a:t>
+            </a:r>
+          </a:p>
+          <a:p>
+            <a:pPr marL="0" indent="0">
+              <a:spcBef>
+                <a:spcPts val="600"/>
+              </a:spcBef>
+              <a:buNone/>
+            </a:pPr>
+            <a:r>
+              <a:rPr lang="es-CO" sz="1800" b="1"/>
+              <a:t>Qué tener en cuenta</a:t>
+            </a:r>
+          </a:p>
+          <a:p>
+            <a:pPr marL="274638" indent="-274638">
+              <a:spcBef>
+                <a:spcPts val="500"/>
+              </a:spcBef>
+              <a:buFont typeface="Arial"/>
+              <a:buChar char="•"/>
+            </a:pPr>
+            <a:r>
+              <a:rPr lang="es-CO" sz="1500"/>
+              <a:t>SAP debe estar abierto y con tu sesión iniciada.</a:t>
+            </a:r>
+          </a:p>
+          <a:p>
+            <a:pPr marL="274638" indent="-274638">
+              <a:spcBef>
+                <a:spcPts val="500"/>
+              </a:spcBef>
+              <a:buFont typeface="Arial"/>
+              <a:buChar char="•"/>
+            </a:pPr>
+            <a:r>
+              <a:rPr lang="es-CO" sz="1500"/>
+              <a:t>La fecha Hasta no puede ser anterior a la fecha Desde.</a:t>
+            </a:r>
+          </a:p>
+          <a:p>
+            <a:pPr marL="274638" indent="-274638">
+              <a:spcBef>
+                <a:spcPts val="500"/>
+              </a:spcBef>
+              <a:buFont typeface="Arial"/>
+              <a:buChar char="•"/>
+            </a:pPr>
+            <a:r>
+              <a:rPr lang="es-CO" sz="1500"/>
+              <a:t>La aplicación toma capturas como evidencia; déjala trabajar.</a:t>
+            </a:r>
+          </a:p>
+        </p:txBody>
+      </p:sp>
+      <p:sp>
+        <p:nvSpPr>
+          <p:cNvPr id="8" name="Marcador de número de diapositiva 7">
+            <a:extLst>
+              <a:ext uri="{FF2B5EF4-FFF2-40B4-BE49-F238E27FC236}">
+                <a16:creationId xmlns:a16="http://schemas.microsoft.com/office/drawing/2014/main" id="{DF45772F-1BFC-EC1A-DFB5-9468420C58B2}"/>
+              </a:ext>
+            </a:extLst>
+          </p:cNvPr>
+          <p:cNvSpPr>
+            <a:spLocks noGrp="1"/>
+          </p:cNvSpPr>
+          <p:nvPr>
+            <p:ph type="sldNum" sz="quarter" idx="4"/>
+          </p:nvPr>
+        </p:nvSpPr>
+        <p:spPr/>
+        <p:txBody>
+          <a:bodyPr/>
+          <a:lstStyle/>
+          <a:p>
+            <a:fld id="{F6EB29E3-579C-284A-BB93-B47AD62E130B}" type="slidenum">
+              <a:rPr lang="es-ES_tradnl" smtClean="0"/>
+              <a:pPr/>
+              <a:t>12</a:t>
+            </a:fld>
+            <a:endParaRPr lang="es-ES_tradnl" sz="1000"/>
+          </a:p>
+        </p:txBody>
+      </p:sp>
+      <p:pic>
+        <p:nvPicPr>
+          <p:cNvPr id="11" name="Imagen 10" descr="Imagen que contiene Interfaz de usuario gráfica  El contenido generado por IA puede ser incorrecto.">
+            <a:extLst>
+              <a:ext uri="{FF2B5EF4-FFF2-40B4-BE49-F238E27FC236}">
+                <a16:creationId xmlns:a16="http://schemas.microsoft.com/office/drawing/2014/main" id="{E08CBAE9-8F59-4A66-BF92-6EB54FBC4CF6}"/>
+              </a:ext>
+            </a:extLst>
+          </p:cNvPr>
+          <p:cNvPicPr>
+            <a:picLocks noChangeAspect="1"/>
+          </p:cNvPicPr>
+          <p:nvPr/>
+        </p:nvPicPr>
+        <p:blipFill>
+          <a:blip r:embed="rId2"/>
+          <a:stretch>
+            <a:fillRect/>
+          </a:stretch>
+        </p:blipFill>
+        <p:spPr>
+          <a:xfrm flipH="1">
+            <a:off x="5982230" y="1539071"/>
+            <a:ext cx="9919503" cy="5574074"/>
+          </a:xfrm>
+          <a:prstGeom prst="rect">
+            <a:avLst/>
+          </a:prstGeom>
+        </p:spPr>
+      </p:pic>
+      <p:sp>
+        <p:nvSpPr>
+          <p:cNvPr id="13" name="Marcador de contenido 5">
+            <a:extLst>
+              <a:ext uri="{FF2B5EF4-FFF2-40B4-BE49-F238E27FC236}">
+                <a16:creationId xmlns:a16="http://schemas.microsoft.com/office/drawing/2014/main" id="{A8E9447D-30F7-EABE-AB32-0F97778CA18C}"/>
+              </a:ext>
+            </a:extLst>
+          </p:cNvPr>
+          <p:cNvSpPr txBox="1">
+            <a:spLocks/>
+          </p:cNvSpPr>
+          <p:nvPr/>
+        </p:nvSpPr>
+        <p:spPr>
+          <a:xfrm>
+            <a:off x="6300000" y="1700000"/>
+            <a:ext cx="5350000" cy="4700000"/>
+          </a:xfrm>
+          <a:prstGeom prst="rect">
+            <a:avLst/>
+          </a:prstGeom>
+        </p:spPr>
+        <p:txBody>
+          <a:bodyPr/>
+          <a:lstStyle/>
+          <a:p>
+            <a:pPr marL="0" indent="0">
+              <a:buNone/>
+            </a:pPr>
+            <a:endParaRPr lang="es-CO"/>
+          </a:p>
+        </p:txBody>
+      </p:sp>
+    </p:spTree>
+    <p:extLst>
+      <p:ext uri="{BB962C8B-B14F-4D97-AF65-F5344CB8AC3E}">
+        <p14:creationId xmlns:p14="http://schemas.microsoft.com/office/powerpoint/2010/main" val="1615763616"/>
+      </p:ext>
+    </p:extLst>
+  </p:cSld>
+  <p:clrMapOvr>
+    <a:masterClrMapping/>
+  </p:clrMapOvr>
+  <mc:AlternateContent xmlns:mc="http://schemas.openxmlformats.org/markup-compatibility/2006" xmlns:p14="http://schemas.microsoft.com/office/powerpoint/2010/main">
+    <mc:Choice Requires="p14">
+      <p:transition p14:dur="350">
+        <p:fade/>
+      </p:transition>
+    </mc:Choice>
+    <mc:Fallback xmlns="">
+      <p:transition>
+        <p:fade/>
+      </p:transition>
+    </mc:Fallback>
+  </mc:AlternateContent>
+</p:sld>
+</file>
+
+<file path=ppt/slides/slide13.xml><?xml version="1.0" encoding="utf-8"?>
 <p:sld xmlns:a="http://schemas.openxmlformats.org/drawingml/2006/main" xmlns:r="http://schemas.openxmlformats.org/officeDocument/2006/relationships" xmlns:p="http://schemas.openxmlformats.org/presentationml/2006/main">
   <p:cSld>
     <p:spTree>
@@ -6622,7 +7503,7 @@
             <a:fld id="{F6EB29E3-579C-284A-BB93-B47AD62E130B}" type="slidenum">
               <a:rPr lang="es-ES_tradnl" smtClean="0"/>
               <a:pPr/>
-              <a:t>10</a:t>
+              <a:t>13</a:t>
             </a:fld>
             <a:endParaRPr lang="es-ES_tradnl" sz="1000"/>
           </a:p>
@@ -6650,7 +7531,7 @@
         </p:blipFill>
         <p:spPr>
           <a:xfrm>
-            <a:off x="-186813" y="713184"/>
+            <a:off x="0" y="146256"/>
             <a:ext cx="12191999" cy="6858000"/>
           </a:xfrm>
           <a:prstGeom prst="rect">
@@ -7249,7 +8130,7 @@
                   <a:schemeClr val="bg1"/>
                 </a:solidFill>
               </a:rPr>
-              <a:t>Se guarda como un archivo de Excel llamado Poblacion, con la sociedad y la fecha en el nombre.</a:t>
+              <a:t>Se guarda como un archivo de Excel llamado Población, con la sociedad y la fecha en el nombre.</a:t>
             </a:r>
           </a:p>
         </p:txBody>
@@ -7309,7 +8190,7 @@
                   <a:schemeClr val="bg1"/>
                 </a:solidFill>
               </a:rPr>
-              <a:t>Tres hojas: el detalle tal como salio de SAP, la lista de activos creados y clasificados, y las evidencias en imagenes del proceso.</a:t>
+              <a:t>Tres hojas: el detalle tal como salió de SAP, la lista de activos creados y clasificados, y las evidencias en imágenes del proceso.</a:t>
             </a:r>
           </a:p>
         </p:txBody>
@@ -7339,7 +8220,398 @@
 </p:sld>
 </file>
 
-<file path=ppt/slides/slide12.xml><?xml version="1.0" encoding="utf-8"?>
+<file path=ppt/slides/slide14.xml><?xml version="1.0" encoding="utf-8"?>
+<p:sld xmlns:a="http://schemas.openxmlformats.org/drawingml/2006/main" xmlns:r="http://schemas.openxmlformats.org/officeDocument/2006/relationships" xmlns:p="http://schemas.openxmlformats.org/presentationml/2006/main">
+  <p:cSld>
+    <p:spTree>
+      <p:nvGrpSpPr>
+        <p:cNvPr id="1" name="">
+          <a:extLst>
+            <a:ext uri="{FF2B5EF4-FFF2-40B4-BE49-F238E27FC236}">
+              <a16:creationId xmlns:a16="http://schemas.microsoft.com/office/drawing/2014/main" id="{67DBDDD0-4560-6ED3-0BB1-0B3EE4624E1C}"/>
+            </a:ext>
+          </a:extLst>
+        </p:cNvPr>
+        <p:cNvGrpSpPr/>
+        <p:nvPr/>
+      </p:nvGrpSpPr>
+      <p:grpSpPr>
+        <a:xfrm>
+          <a:off x="0" y="0"/>
+          <a:ext cx="0" cy="0"/>
+          <a:chOff x="0" y="0"/>
+          <a:chExt cx="0" cy="0"/>
+        </a:xfrm>
+      </p:grpSpPr>
+      <p:sp>
+        <p:nvSpPr>
+          <p:cNvPr id="2" name="Marcador de número de diapositiva 1">
+            <a:extLst>
+              <a:ext uri="{FF2B5EF4-FFF2-40B4-BE49-F238E27FC236}">
+                <a16:creationId xmlns:a16="http://schemas.microsoft.com/office/drawing/2014/main" id="{007230E2-C3A4-E5CD-B8D8-DF729C099ABE}"/>
+              </a:ext>
+            </a:extLst>
+          </p:cNvPr>
+          <p:cNvSpPr>
+            <a:spLocks noGrp="1"/>
+          </p:cNvSpPr>
+          <p:nvPr>
+            <p:ph type="sldNum" sz="quarter" idx="4"/>
+          </p:nvPr>
+        </p:nvSpPr>
+        <p:spPr/>
+        <p:txBody>
+          <a:bodyPr/>
+          <a:lstStyle/>
+          <a:p>
+            <a:fld id="{F6EB29E3-579C-284A-BB93-B47AD62E130B}" type="slidenum">
+              <a:rPr lang="es-ES_tradnl" smtClean="0"/>
+              <a:pPr/>
+              <a:t>14</a:t>
+            </a:fld>
+            <a:endParaRPr lang="es-ES_tradnl" sz="1000"/>
+          </a:p>
+        </p:txBody>
+      </p:sp>
+      <p:pic>
+        <p:nvPicPr>
+          <p:cNvPr id="6" name="Imagen 5" descr="Una caricatura de una persona  El contenido generado por IA puede ser incorrecto.">
+            <a:extLst>
+              <a:ext uri="{FF2B5EF4-FFF2-40B4-BE49-F238E27FC236}">
+                <a16:creationId xmlns:a16="http://schemas.microsoft.com/office/drawing/2014/main" id="{05E8414B-97B1-D3B1-7671-4AFAAB8B13F9}"/>
+              </a:ext>
+            </a:extLst>
+          </p:cNvPr>
+          <p:cNvPicPr>
+            <a:picLocks noChangeAspect="1"/>
+          </p:cNvPicPr>
+          <p:nvPr/>
+        </p:nvPicPr>
+        <p:blipFill>
+          <a:blip r:embed="rId2"/>
+          <a:stretch>
+            <a:fillRect/>
+          </a:stretch>
+        </p:blipFill>
+        <p:spPr>
+          <a:xfrm>
+            <a:off x="-334963" y="1043224"/>
+            <a:ext cx="12191999" cy="6858000"/>
+          </a:xfrm>
+          <a:prstGeom prst="rect">
+            <a:avLst/>
+          </a:prstGeom>
+        </p:spPr>
+      </p:pic>
+      <p:pic>
+        <p:nvPicPr>
+          <p:cNvPr id="4" name="Imagen 3" descr="Logotipo  El contenido generado por IA puede ser incorrecto.">
+            <a:extLst>
+              <a:ext uri="{FF2B5EF4-FFF2-40B4-BE49-F238E27FC236}">
+                <a16:creationId xmlns:a16="http://schemas.microsoft.com/office/drawing/2014/main" id="{ADA3B400-2E63-AB6A-B1D6-D02BD6A90E9E}"/>
+              </a:ext>
+            </a:extLst>
+          </p:cNvPr>
+          <p:cNvPicPr>
+            <a:picLocks noChangeAspect="1"/>
+          </p:cNvPicPr>
+          <p:nvPr/>
+        </p:nvPicPr>
+        <p:blipFill>
+          <a:blip r:embed="rId3"/>
+          <a:stretch>
+            <a:fillRect/>
+          </a:stretch>
+        </p:blipFill>
+        <p:spPr>
+          <a:xfrm>
+            <a:off x="10804414" y="333378"/>
+            <a:ext cx="1053147" cy="610520"/>
+          </a:xfrm>
+          <a:prstGeom prst="rect">
+            <a:avLst/>
+          </a:prstGeom>
+        </p:spPr>
+      </p:pic>
+      <p:sp>
+        <p:nvSpPr>
+          <p:cNvPr id="9" name="Título 1">
+            <a:extLst>
+              <a:ext uri="{FF2B5EF4-FFF2-40B4-BE49-F238E27FC236}">
+                <a16:creationId xmlns:a16="http://schemas.microsoft.com/office/drawing/2014/main" id="{CADD0DD5-CBD6-33C9-F773-B53B07DCDDFE}"/>
+              </a:ext>
+            </a:extLst>
+          </p:cNvPr>
+          <p:cNvSpPr txBox="1">
+            <a:spLocks/>
+          </p:cNvSpPr>
+          <p:nvPr/>
+        </p:nvSpPr>
+        <p:spPr>
+          <a:xfrm>
+            <a:off x="1022906" y="250000"/>
+            <a:ext cx="9200000" cy="1050000"/>
+          </a:xfrm>
+          <a:prstGeom prst="rect">
+            <a:avLst/>
+          </a:prstGeom>
+        </p:spPr>
+        <p:txBody>
+          <a:bodyPr/>
+          <a:lstStyle/>
+          <a:p>
+            <a:pPr marL="0" indent="0">
+              <a:buNone/>
+            </a:pPr>
+            <a:r>
+              <a:rPr lang="es-CO">
+                <a:solidFill>
+                  <a:srgbClr val="1A3A6C"/>
+                </a:solidFill>
+                <a:latin typeface="Bariol" panose="02000506040000020003" pitchFamily="50" charset="0"/>
+              </a:rPr>
+              <a:t>Consejos y solución de problemas</a:t>
+            </a:r>
+          </a:p>
+        </p:txBody>
+      </p:sp>
+      <p:sp>
+        <p:nvSpPr>
+          <p:cNvPr id="10" name="Subtítulo 2">
+            <a:extLst>
+              <a:ext uri="{FF2B5EF4-FFF2-40B4-BE49-F238E27FC236}">
+                <a16:creationId xmlns:a16="http://schemas.microsoft.com/office/drawing/2014/main" id="{4CD61A4D-B0ED-70E5-B2B0-CDA5CB277D91}"/>
+              </a:ext>
+            </a:extLst>
+          </p:cNvPr>
+          <p:cNvSpPr txBox="1">
+            <a:spLocks/>
+          </p:cNvSpPr>
+          <p:nvPr/>
+        </p:nvSpPr>
+        <p:spPr>
+          <a:xfrm>
+            <a:off x="1022906" y="1480000"/>
+            <a:ext cx="9000000" cy="4900000"/>
+          </a:xfrm>
+          <a:prstGeom prst="rect">
+            <a:avLst/>
+          </a:prstGeom>
+        </p:spPr>
+        <p:txBody>
+          <a:bodyPr>
+            <a:normAutofit/>
+          </a:bodyPr>
+          <a:lstStyle/>
+          <a:p>
+            <a:pPr marL="274638" indent="-274638">
+              <a:spcBef>
+                <a:spcPts val="500"/>
+              </a:spcBef>
+              <a:buFont typeface="Arial"/>
+              <a:buChar char="•"/>
+            </a:pPr>
+            <a:r>
+              <a:rPr lang="es-CO" sz="1600">
+                <a:solidFill>
+                  <a:schemeClr val="bg1"/>
+                </a:solidFill>
+              </a:rPr>
+              <a:t>Si el botón Creación de Activo está apagado, primero extrae la información en txt.</a:t>
+            </a:r>
+          </a:p>
+          <a:p>
+            <a:pPr marL="274638" indent="-274638">
+              <a:spcBef>
+                <a:spcPts val="500"/>
+              </a:spcBef>
+              <a:buFont typeface="Arial"/>
+              <a:buChar char="•"/>
+            </a:pPr>
+            <a:r>
+              <a:rPr lang="es-CO" sz="1600">
+                <a:solidFill>
+                  <a:schemeClr val="bg1"/>
+                </a:solidFill>
+              </a:rPr>
+              <a:t>Si aparece que no encuentra SAP, verifica que SAP esté abierto y con tu sesión iniciada.</a:t>
+            </a:r>
+          </a:p>
+          <a:p>
+            <a:pPr marL="274638" indent="-274638">
+              <a:spcBef>
+                <a:spcPts val="500"/>
+              </a:spcBef>
+              <a:buFont typeface="Arial"/>
+              <a:buChar char="•"/>
+            </a:pPr>
+            <a:r>
+              <a:rPr lang="es-CO" sz="1600">
+                <a:solidFill>
+                  <a:schemeClr val="bg1"/>
+                </a:solidFill>
+              </a:rPr>
+              <a:t>Guarda siempre el Excel antes de extraer la información.</a:t>
+            </a:r>
+          </a:p>
+          <a:p>
+            <a:pPr marL="274638" indent="-274638">
+              <a:spcBef>
+                <a:spcPts val="500"/>
+              </a:spcBef>
+              <a:buFont typeface="Arial"/>
+              <a:buChar char="•"/>
+            </a:pPr>
+            <a:r>
+              <a:rPr lang="es-CO" sz="1600">
+                <a:solidFill>
+                  <a:schemeClr val="bg1"/>
+                </a:solidFill>
+              </a:rPr>
+              <a:t>No uses el equipo mientras la aplicación trabaja con SAP.</a:t>
+            </a:r>
+          </a:p>
+          <a:p>
+            <a:pPr marL="274638" indent="-274638">
+              <a:spcBef>
+                <a:spcPts val="500"/>
+              </a:spcBef>
+              <a:buFont typeface="Arial"/>
+              <a:buChar char="•"/>
+            </a:pPr>
+            <a:r>
+              <a:rPr lang="es-CO" sz="1600">
+                <a:solidFill>
+                  <a:schemeClr val="bg1"/>
+                </a:solidFill>
+              </a:rPr>
+              <a:t>Revisa el listado de activos creados para confirmar el resultado.</a:t>
+            </a:r>
+          </a:p>
+        </p:txBody>
+      </p:sp>
+      <p:sp>
+        <p:nvSpPr>
+          <p:cNvPr id="12" name="Título 11">
+            <a:extLst>
+              <a:ext uri="{FF2B5EF4-FFF2-40B4-BE49-F238E27FC236}">
+                <a16:creationId xmlns:a16="http://schemas.microsoft.com/office/drawing/2014/main" id="{83E2D80B-D749-946A-725D-4991F6E76397}"/>
+              </a:ext>
+            </a:extLst>
+          </p:cNvPr>
+          <p:cNvSpPr>
+            <a:spLocks noGrp="1"/>
+          </p:cNvSpPr>
+          <p:nvPr>
+            <p:ph type="title"/>
+          </p:nvPr>
+        </p:nvSpPr>
+        <p:spPr/>
+        <p:txBody>
+          <a:bodyPr/>
+          <a:lstStyle/>
+          <a:p>
+            <a:r>
+              <a:rPr lang="es-CO"/>
+              <a:t>¿</a:t>
+            </a:r>
+          </a:p>
+        </p:txBody>
+      </p:sp>
+      <p:sp>
+        <p:nvSpPr>
+          <p:cNvPr id="13" name="Título 1">
+            <a:extLst>
+              <a:ext uri="{FF2B5EF4-FFF2-40B4-BE49-F238E27FC236}">
+                <a16:creationId xmlns:a16="http://schemas.microsoft.com/office/drawing/2014/main" id="{F68C82FE-7ECA-ACC8-8DF3-1C5639984A2D}"/>
+              </a:ext>
+            </a:extLst>
+          </p:cNvPr>
+          <p:cNvSpPr txBox="1">
+            <a:spLocks/>
+          </p:cNvSpPr>
+          <p:nvPr/>
+        </p:nvSpPr>
+        <p:spPr>
+          <a:xfrm>
+            <a:off x="9033477" y="432704"/>
+            <a:ext cx="8905114" cy="2852737"/>
+          </a:xfrm>
+          <a:prstGeom prst="rect">
+            <a:avLst/>
+          </a:prstGeom>
+        </p:spPr>
+        <p:txBody>
+          <a:bodyPr/>
+          <a:lstStyle/>
+          <a:p>
+            <a:pPr marL="0" indent="0">
+              <a:buNone/>
+            </a:pPr>
+            <a:endParaRPr/>
+          </a:p>
+        </p:txBody>
+      </p:sp>
+      <p:sp>
+        <p:nvSpPr>
+          <p:cNvPr id="14" name="Subtítulo 2">
+            <a:extLst>
+              <a:ext uri="{FF2B5EF4-FFF2-40B4-BE49-F238E27FC236}">
+                <a16:creationId xmlns:a16="http://schemas.microsoft.com/office/drawing/2014/main" id="{75646921-4C86-4774-8050-57C2CB8E56C6}"/>
+              </a:ext>
+            </a:extLst>
+          </p:cNvPr>
+          <p:cNvSpPr txBox="1">
+            <a:spLocks/>
+          </p:cNvSpPr>
+          <p:nvPr/>
+        </p:nvSpPr>
+        <p:spPr>
+          <a:xfrm>
+            <a:off x="1022906" y="3700000"/>
+            <a:ext cx="7146172" cy="2200000"/>
+          </a:xfrm>
+          <a:prstGeom prst="rect">
+            <a:avLst/>
+          </a:prstGeom>
+        </p:spPr>
+        <p:txBody>
+          <a:bodyPr/>
+          <a:lstStyle/>
+          <a:p>
+            <a:pPr marL="0" indent="0">
+              <a:buNone/>
+            </a:pPr>
+            <a:endParaRPr lang="es-CO"/>
+          </a:p>
+        </p:txBody>
+      </p:sp>
+    </p:spTree>
+    <p:extLst>
+      <p:ext uri="{BB962C8B-B14F-4D97-AF65-F5344CB8AC3E}">
+        <p14:creationId xmlns:p14="http://schemas.microsoft.com/office/powerpoint/2010/main" val="332823668"/>
+      </p:ext>
+    </p:extLst>
+  </p:cSld>
+  <p:clrMapOvr>
+    <a:masterClrMapping/>
+  </p:clrMapOvr>
+  <mc:AlternateContent xmlns:mc="http://schemas.openxmlformats.org/markup-compatibility/2006" xmlns:p14="http://schemas.microsoft.com/office/powerpoint/2010/main">
+    <mc:Choice Requires="p14">
+      <p:transition p14:dur="350">
+        <p:fade/>
+      </p:transition>
+    </mc:Choice>
+    <mc:Fallback xmlns="">
+      <p:transition>
+        <p:fade/>
+      </p:transition>
+    </mc:Fallback>
+  </mc:AlternateContent>
+</p:sld>
+</file>
+
+<file path=ppt/slides/slide15.xml><?xml version="1.0" encoding="utf-8"?>
 <p:sld xmlns:a="http://schemas.openxmlformats.org/drawingml/2006/main" xmlns:r="http://schemas.openxmlformats.org/officeDocument/2006/relationships" xmlns:p="http://schemas.openxmlformats.org/presentationml/2006/main">
   <p:cSld>
     <p:spTree>
@@ -7381,7 +8653,7 @@
 </p:sld>
 </file>
 
-<file path=ppt/slides/slide13.xml><?xml version="1.0" encoding="utf-8"?>
+<file path=ppt/slides/slide2.xml><?xml version="1.0" encoding="utf-8"?>
 <p:sld xmlns:a="http://schemas.openxmlformats.org/drawingml/2006/main" xmlns:r="http://schemas.openxmlformats.org/officeDocument/2006/relationships" xmlns:p="http://schemas.openxmlformats.org/presentationml/2006/main">
   <p:cSld>
     <p:spTree>
@@ -7422,7 +8694,7 @@
             <a:fld id="{F6EB29E3-579C-284A-BB93-B47AD62E130B}" type="slidenum">
               <a:rPr lang="es-ES_tradnl" smtClean="0"/>
               <a:pPr/>
-              <a:t>7</a:t>
+              <a:t>2</a:t>
             </a:fld>
             <a:endParaRPr lang="es-ES_tradnl" sz="1000"/>
           </a:p>
@@ -7521,7 +8793,7 @@
               <a:rPr lang="es-CO">
                 <a:latin typeface="Bariol" panose="02000506040000020003" pitchFamily="50" charset="0"/>
               </a:rPr>
-              <a:t>Paso 1 · Extraer la información</a:t>
+              <a:t>¿Qué es esta aplicación?</a:t>
             </a:r>
           </a:p>
         </p:txBody>
@@ -7559,8 +8831,8 @@
               <a:buNone/>
             </a:pPr>
             <a:r>
-              <a:rPr lang="es-CO"/>
-              <a:t>Entra a la tarjeta Activos Fijos y pulsa Extraer informacion en txt.</a:t>
+              <a:rPr lang="es-CO" dirty="0"/>
+              <a:t>Es una aplicación para tu computador que crea y capitaliza activos fijos en SAP de forma automática.</a:t>
             </a:r>
           </a:p>
           <a:p>
@@ -7571,8 +8843,8 @@
               <a:buNone/>
             </a:pPr>
             <a:r>
-              <a:rPr lang="es-CO"/>
-              <a:t>La aplicacion toma los datos del formulario de Excel y los deja listos para SAP.</a:t>
+              <a:rPr lang="es-CO" dirty="0"/>
+              <a:t>En lugar de cargar la información a mano, pantalla por pantalla, toma los datos que preparaste en Excel y los registra en SAP por ti.</a:t>
             </a:r>
           </a:p>
           <a:p>
@@ -7583,8 +8855,8 @@
               <a:buNone/>
             </a:pPr>
             <a:r>
-              <a:rPr lang="es-CO"/>
-              <a:t>Si ya existe una extraccion anterior, te preguntara si deseas reemplazarla.</a:t>
+              <a:rPr lang="es-CO" dirty="0"/>
+              <a:t>También genera el reporte de control SOX y te permite consultar los activos que se crearon.</a:t>
             </a:r>
           </a:p>
           <a:p>
@@ -7595,20 +8867,8 @@
               <a:buNone/>
             </a:pPr>
             <a:r>
-              <a:rPr lang="es-CO"/>
-              <a:t>Al terminar veras un mensaje con la cantidad de registros preparados.</a:t>
-            </a:r>
-          </a:p>
-          <a:p>
-            <a:pPr marL="0" indent="0">
-              <a:spcBef>
-                <a:spcPts val="600"/>
-              </a:spcBef>
-              <a:buNone/>
-            </a:pPr>
-            <a:r>
-              <a:rPr lang="es-CO" b="1"/>
-              <a:t>Recuerda guardar el Excel antes de extraer, para que los datos esten actualizados.</a:t>
+              <a:rPr lang="es-CO" dirty="0"/>
+              <a:t>Tú preparas y supervisas; la aplicación hace el trabajo repetitivo.</a:t>
             </a:r>
           </a:p>
         </p:txBody>
@@ -7617,1212 +8877,6 @@
     <p:extLst>
       <p:ext uri="{BB962C8B-B14F-4D97-AF65-F5344CB8AC3E}">
         <p14:creationId xmlns:p14="http://schemas.microsoft.com/office/powerpoint/2010/main" val="4030836509"/>
-      </p:ext>
-    </p:extLst>
-  </p:cSld>
-  <p:clrMapOvr>
-    <a:masterClrMapping/>
-  </p:clrMapOvr>
-  <mc:AlternateContent xmlns:mc="http://schemas.openxmlformats.org/markup-compatibility/2006" xmlns:p14="http://schemas.microsoft.com/office/powerpoint/2010/main">
-    <mc:Choice Requires="p14">
-      <p:transition p14:dur="350">
-        <p:fade/>
-      </p:transition>
-    </mc:Choice>
-    <mc:Fallback xmlns="">
-      <p:transition>
-        <p:fade/>
-      </p:transition>
-    </mc:Fallback>
-  </mc:AlternateContent>
-</p:sld>
-</file>
-
-<file path=ppt/slides/slide14.xml><?xml version="1.0" encoding="utf-8"?>
-<p:sld xmlns:a="http://schemas.openxmlformats.org/drawingml/2006/main" xmlns:r="http://schemas.openxmlformats.org/officeDocument/2006/relationships" xmlns:p="http://schemas.openxmlformats.org/presentationml/2006/main">
-  <p:cSld>
-    <p:spTree>
-      <p:nvGrpSpPr>
-        <p:cNvPr id="1" name=""/>
-        <p:cNvGrpSpPr/>
-        <p:nvPr/>
-      </p:nvGrpSpPr>
-      <p:grpSpPr>
-        <a:xfrm>
-          <a:off x="0" y="0"/>
-          <a:ext cx="0" cy="0"/>
-          <a:chOff x="0" y="0"/>
-          <a:chExt cx="0" cy="0"/>
-        </a:xfrm>
-      </p:grpSpPr>
-      <p:sp>
-        <p:nvSpPr>
-          <p:cNvPr id="2" name="Marcador de número de diapositiva 1">
-            <a:extLst>
-              <a:ext uri="{FF2B5EF4-FFF2-40B4-BE49-F238E27FC236}">
-                <a16:creationId xmlns:a16="http://schemas.microsoft.com/office/drawing/2014/main" id="{DEA09B1E-6BAE-95BB-0BBF-123CF2C891BA}"/>
-              </a:ext>
-            </a:extLst>
-          </p:cNvPr>
-          <p:cNvSpPr>
-            <a:spLocks noGrp="1"/>
-          </p:cNvSpPr>
-          <p:nvPr>
-            <p:ph type="sldNum" sz="quarter" idx="4"/>
-          </p:nvPr>
-        </p:nvSpPr>
-        <p:spPr/>
-        <p:txBody>
-          <a:bodyPr/>
-          <a:lstStyle/>
-          <a:p>
-            <a:fld id="{F6EB29E3-579C-284A-BB93-B47AD62E130B}" type="slidenum">
-              <a:rPr lang="es-ES_tradnl" smtClean="0"/>
-              <a:pPr/>
-              <a:t>8</a:t>
-            </a:fld>
-            <a:endParaRPr lang="es-ES_tradnl" sz="1000"/>
-          </a:p>
-        </p:txBody>
-      </p:sp>
-      <p:pic>
-        <p:nvPicPr>
-          <p:cNvPr id="8" name="Imagen 7" descr="Imagen que contiene Icono  El contenido generado por IA puede ser incorrecto.">
-            <a:extLst>
-              <a:ext uri="{FF2B5EF4-FFF2-40B4-BE49-F238E27FC236}">
-                <a16:creationId xmlns:a16="http://schemas.microsoft.com/office/drawing/2014/main" id="{FD870812-987C-D46A-56A5-567719FA0FBA}"/>
-              </a:ext>
-            </a:extLst>
-          </p:cNvPr>
-          <p:cNvPicPr>
-            <a:picLocks noChangeAspect="1"/>
-          </p:cNvPicPr>
-          <p:nvPr/>
-        </p:nvPicPr>
-        <p:blipFill>
-          <a:blip r:embed="rId2"/>
-          <a:stretch>
-            <a:fillRect/>
-          </a:stretch>
-        </p:blipFill>
-        <p:spPr>
-          <a:xfrm>
-            <a:off x="1" y="0"/>
-            <a:ext cx="12191999" cy="6858000"/>
-          </a:xfrm>
-          <a:prstGeom prst="rect">
-            <a:avLst/>
-          </a:prstGeom>
-        </p:spPr>
-      </p:pic>
-      <p:pic>
-        <p:nvPicPr>
-          <p:cNvPr id="9" name="Imagen 8" descr="Logotipo  El contenido generado por IA puede ser incorrecto.">
-            <a:extLst>
-              <a:ext uri="{FF2B5EF4-FFF2-40B4-BE49-F238E27FC236}">
-                <a16:creationId xmlns:a16="http://schemas.microsoft.com/office/drawing/2014/main" id="{6948155E-6163-E469-7243-84A46C29CF3C}"/>
-              </a:ext>
-            </a:extLst>
-          </p:cNvPr>
-          <p:cNvPicPr>
-            <a:picLocks noChangeAspect="1"/>
-          </p:cNvPicPr>
-          <p:nvPr/>
-        </p:nvPicPr>
-        <p:blipFill>
-          <a:blip r:embed="rId3"/>
-          <a:stretch>
-            <a:fillRect/>
-          </a:stretch>
-        </p:blipFill>
-        <p:spPr>
-          <a:xfrm>
-            <a:off x="10804414" y="333378"/>
-            <a:ext cx="1053147" cy="610520"/>
-          </a:xfrm>
-          <a:prstGeom prst="rect">
-            <a:avLst/>
-          </a:prstGeom>
-        </p:spPr>
-      </p:pic>
-      <p:sp>
-        <p:nvSpPr>
-          <p:cNvPr id="3" name="Título 1">
-            <a:extLst>
-              <a:ext uri="{FF2B5EF4-FFF2-40B4-BE49-F238E27FC236}">
-                <a16:creationId xmlns:a16="http://schemas.microsoft.com/office/drawing/2014/main" id="{AD0FC757-D97E-0DF1-ED2B-AE9100758E79}"/>
-              </a:ext>
-            </a:extLst>
-          </p:cNvPr>
-          <p:cNvSpPr>
-            <a:spLocks noGrp="1"/>
-          </p:cNvSpPr>
-          <p:nvPr>
-            <p:ph type="title"/>
-          </p:nvPr>
-        </p:nvSpPr>
-        <p:spPr>
-          <a:xfrm>
-            <a:off x="4670617" y="-482471"/>
-            <a:ext cx="7000000" cy="2852737"/>
-          </a:xfrm>
-        </p:spPr>
-        <p:txBody>
-          <a:bodyPr/>
-          <a:lstStyle/>
-          <a:p>
-            <a:pPr marL="0" indent="0">
-              <a:buNone/>
-            </a:pPr>
-            <a:r>
-              <a:rPr lang="es-CO" sz="3200">
-                <a:solidFill>
-                  <a:schemeClr val="bg1"/>
-                </a:solidFill>
-                <a:latin typeface="Bariol" panose="02000506040000020003" pitchFamily="50" charset="0"/>
-              </a:rPr>
-              <a:t>Paso 2 · Crear el activo en SAP</a:t>
-            </a:r>
-          </a:p>
-        </p:txBody>
-      </p:sp>
-      <p:sp>
-        <p:nvSpPr>
-          <p:cNvPr id="5" name="Subtítulo 2">
-            <a:extLst>
-              <a:ext uri="{FF2B5EF4-FFF2-40B4-BE49-F238E27FC236}">
-                <a16:creationId xmlns:a16="http://schemas.microsoft.com/office/drawing/2014/main" id="{909C0CE7-C067-0659-3393-EE588C294EF6}"/>
-              </a:ext>
-            </a:extLst>
-          </p:cNvPr>
-          <p:cNvSpPr txBox="1">
-            <a:spLocks/>
-          </p:cNvSpPr>
-          <p:nvPr/>
-        </p:nvSpPr>
-        <p:spPr>
-          <a:xfrm>
-            <a:off x="4670617" y="2476783"/>
-            <a:ext cx="7146172" cy="4100000"/>
-          </a:xfrm>
-          <a:prstGeom prst="rect">
-            <a:avLst/>
-          </a:prstGeom>
-        </p:spPr>
-        <p:txBody>
-          <a:bodyPr>
-            <a:normAutofit/>
-          </a:bodyPr>
-          <a:lstStyle/>
-          <a:p>
-            <a:pPr marL="0" indent="0">
-              <a:buNone/>
-            </a:pPr>
-            <a:r>
-              <a:rPr lang="es-CO">
-                <a:solidFill>
-                  <a:schemeClr val="bg1"/>
-                </a:solidFill>
-              </a:rPr>
-              <a:t>Con SAP abierto, pulsa Creacion de Activo.</a:t>
-            </a:r>
-          </a:p>
-          <a:p>
-            <a:pPr marL="0" indent="0">
-              <a:spcBef>
-                <a:spcPts val="600"/>
-              </a:spcBef>
-              <a:buNone/>
-            </a:pPr>
-            <a:r>
-              <a:rPr lang="es-CO">
-                <a:solidFill>
-                  <a:schemeClr val="bg1"/>
-                </a:solidFill>
-              </a:rPr>
-              <a:t>Este boton se habilita solo cuando ya hay una extraccion lista.</a:t>
-            </a:r>
-          </a:p>
-          <a:p>
-            <a:pPr marL="0" indent="0">
-              <a:spcBef>
-                <a:spcPts val="600"/>
-              </a:spcBef>
-              <a:buNone/>
-            </a:pPr>
-            <a:r>
-              <a:rPr lang="es-CO">
-                <a:solidFill>
-                  <a:schemeClr val="bg1"/>
-                </a:solidFill>
-              </a:rPr>
-              <a:t>La aplicacion pedira confirmacion y luego cargara la informacion en SAP automaticamente, paso a paso. Veras el avance en pantalla.</a:t>
-            </a:r>
-          </a:p>
-          <a:p>
-            <a:pPr marL="0" indent="0">
-              <a:spcBef>
-                <a:spcPts val="600"/>
-              </a:spcBef>
-              <a:buNone/>
-            </a:pPr>
-            <a:r>
-              <a:rPr lang="es-CO" b="1">
-                <a:solidFill>
-                  <a:schemeClr val="bg1"/>
-                </a:solidFill>
-              </a:rPr>
-              <a:t>No toques el equipo mientras trabaja. Al finalizar, los activos quedan creados en SAP.</a:t>
-            </a:r>
-          </a:p>
-        </p:txBody>
-      </p:sp>
-    </p:spTree>
-    <p:extLst>
-      <p:ext uri="{BB962C8B-B14F-4D97-AF65-F5344CB8AC3E}">
-        <p14:creationId xmlns:p14="http://schemas.microsoft.com/office/powerpoint/2010/main" val="590287769"/>
-      </p:ext>
-    </p:extLst>
-  </p:cSld>
-  <p:clrMapOvr>
-    <a:masterClrMapping/>
-  </p:clrMapOvr>
-  <mc:AlternateContent xmlns:mc="http://schemas.openxmlformats.org/markup-compatibility/2006" xmlns:p14="http://schemas.microsoft.com/office/powerpoint/2010/main">
-    <mc:Choice Requires="p14">
-      <p:transition p14:dur="350">
-        <p:fade/>
-      </p:transition>
-    </mc:Choice>
-    <mc:Fallback xmlns="">
-      <p:transition>
-        <p:fade/>
-      </p:transition>
-    </mc:Fallback>
-  </mc:AlternateContent>
-</p:sld>
-</file>
-
-<file path=ppt/slides/slide16.xml><?xml version="1.0" encoding="utf-8"?>
-<p:sld xmlns:a="http://schemas.openxmlformats.org/drawingml/2006/main" xmlns:r="http://schemas.openxmlformats.org/officeDocument/2006/relationships" xmlns:p="http://schemas.openxmlformats.org/presentationml/2006/main">
-  <p:cSld>
-    <p:spTree>
-      <p:nvGrpSpPr>
-        <p:cNvPr id="1" name=""/>
-        <p:cNvGrpSpPr/>
-        <p:nvPr/>
-      </p:nvGrpSpPr>
-      <p:grpSpPr>
-        <a:xfrm>
-          <a:off x="0" y="0"/>
-          <a:ext cx="0" cy="0"/>
-          <a:chOff x="0" y="0"/>
-          <a:chExt cx="0" cy="0"/>
-        </a:xfrm>
-      </p:grpSpPr>
-      <p:sp>
-        <p:nvSpPr>
-          <p:cNvPr id="2" name="Título 1">
-            <a:extLst>
-              <a:ext uri="{FF2B5EF4-FFF2-40B4-BE49-F238E27FC236}">
-                <a16:creationId xmlns:a16="http://schemas.microsoft.com/office/drawing/2014/main" id="{8E015669-66ED-D51F-0B8F-226AFFBCF523}"/>
-              </a:ext>
-            </a:extLst>
-          </p:cNvPr>
-          <p:cNvSpPr>
-            <a:spLocks noGrp="1"/>
-          </p:cNvSpPr>
-          <p:nvPr>
-            <p:ph type="title"/>
-          </p:nvPr>
-        </p:nvSpPr>
-        <p:spPr/>
-        <p:txBody>
-          <a:bodyPr/>
-          <a:lstStyle/>
-          <a:p>
-            <a:pPr marL="0" indent="0">
-              <a:buNone/>
-            </a:pPr>
-            <a:r>
-              <a:rPr lang="es-CO">
-                <a:latin typeface="Bariol" panose="02000506040000020003" pitchFamily="50" charset="0"/>
-              </a:rPr>
-              <a:t>Control SOX</a:t>
-            </a:r>
-          </a:p>
-        </p:txBody>
-      </p:sp>
-      <p:sp>
-        <p:nvSpPr>
-          <p:cNvPr id="3" name="Marcador de texto 2">
-            <a:extLst>
-              <a:ext uri="{FF2B5EF4-FFF2-40B4-BE49-F238E27FC236}">
-                <a16:creationId xmlns:a16="http://schemas.microsoft.com/office/drawing/2014/main" id="{42CAB150-398A-0BEF-B691-BF9A66542303}"/>
-              </a:ext>
-            </a:extLst>
-          </p:cNvPr>
-          <p:cNvSpPr>
-            <a:spLocks noGrp="1"/>
-          </p:cNvSpPr>
-          <p:nvPr>
-            <p:ph type="body" idx="1"/>
-          </p:nvPr>
-        </p:nvSpPr>
-        <p:spPr/>
-        <p:txBody>
-          <a:bodyPr/>
-          <a:lstStyle/>
-          <a:p>
-            <a:pPr marL="0" indent="0">
-              <a:buNone/>
-            </a:pPr>
-            <a:r>
-              <a:rPr lang="es-CO"/>
-              <a:t>Genera el reporte de control de activos con todas sus evidencias, listo para auditoria.</a:t>
-            </a:r>
-          </a:p>
-        </p:txBody>
-      </p:sp>
-      <p:sp>
-        <p:nvSpPr>
-          <p:cNvPr id="4" name="Marcador de texto 3">
-            <a:extLst>
-              <a:ext uri="{FF2B5EF4-FFF2-40B4-BE49-F238E27FC236}">
-                <a16:creationId xmlns:a16="http://schemas.microsoft.com/office/drawing/2014/main" id="{A48A5407-45D9-3659-5333-5E8867BC1B6A}"/>
-              </a:ext>
-            </a:extLst>
-          </p:cNvPr>
-          <p:cNvSpPr>
-            <a:spLocks noGrp="1"/>
-          </p:cNvSpPr>
-          <p:nvPr>
-            <p:ph type="body" sz="quarter" idx="10"/>
-          </p:nvPr>
-        </p:nvSpPr>
-        <p:spPr/>
-        <p:txBody>
-          <a:bodyPr/>
-          <a:lstStyle/>
-          <a:p>
-            <a:pPr marL="0" indent="0">
-              <a:buNone/>
-            </a:pPr>
-            <a:r>
-              <a:rPr lang="es-CO">
-                <a:latin typeface="Bariol" panose="02000506040000020003" pitchFamily="50" charset="0"/>
-              </a:rPr>
-              <a:t>2</a:t>
-            </a:r>
-          </a:p>
-        </p:txBody>
-      </p:sp>
-    </p:spTree>
-    <p:extLst>
-      <p:ext uri="{BB962C8B-B14F-4D97-AF65-F5344CB8AC3E}">
-        <p14:creationId xmlns:p14="http://schemas.microsoft.com/office/powerpoint/2010/main" val="623546703"/>
-      </p:ext>
-    </p:extLst>
-  </p:cSld>
-  <p:clrMapOvr>
-    <a:masterClrMapping/>
-  </p:clrMapOvr>
-  <mc:AlternateContent xmlns:mc="http://schemas.openxmlformats.org/markup-compatibility/2006" xmlns:p14="http://schemas.microsoft.com/office/powerpoint/2010/main">
-    <mc:Choice Requires="p14">
-      <p:transition p14:dur="350">
-        <p:fade/>
-      </p:transition>
-    </mc:Choice>
-    <mc:Fallback xmlns="">
-      <p:transition>
-        <p:fade/>
-      </p:transition>
-    </mc:Fallback>
-  </mc:AlternateContent>
-</p:sld>
-</file>
-
-<file path=ppt/slides/slide17.xml><?xml version="1.0" encoding="utf-8"?>
-<p:sld xmlns:a="http://schemas.openxmlformats.org/drawingml/2006/main" xmlns:r="http://schemas.openxmlformats.org/officeDocument/2006/relationships" xmlns:p="http://schemas.openxmlformats.org/presentationml/2006/main">
-  <p:cSld>
-    <p:spTree>
-      <p:nvGrpSpPr>
-        <p:cNvPr id="1" name="">
-          <a:extLst>
-            <a:ext uri="{FF2B5EF4-FFF2-40B4-BE49-F238E27FC236}">
-              <a16:creationId xmlns:a16="http://schemas.microsoft.com/office/drawing/2014/main" id="{1A689B8B-7DDE-8534-B66D-13E2691DEE8A}"/>
-            </a:ext>
-          </a:extLst>
-        </p:cNvPr>
-        <p:cNvGrpSpPr/>
-        <p:nvPr/>
-      </p:nvGrpSpPr>
-      <p:grpSpPr>
-        <a:xfrm>
-          <a:off x="0" y="0"/>
-          <a:ext cx="0" cy="0"/>
-          <a:chOff x="0" y="0"/>
-          <a:chExt cx="0" cy="0"/>
-        </a:xfrm>
-      </p:grpSpPr>
-      <p:sp>
-        <p:nvSpPr>
-          <p:cNvPr id="5" name="Título 4">
-            <a:extLst>
-              <a:ext uri="{FF2B5EF4-FFF2-40B4-BE49-F238E27FC236}">
-                <a16:creationId xmlns:a16="http://schemas.microsoft.com/office/drawing/2014/main" id="{716A16E2-6542-47AB-CB5A-AA1A42C8F968}"/>
-              </a:ext>
-            </a:extLst>
-          </p:cNvPr>
-          <p:cNvSpPr>
-            <a:spLocks noGrp="1"/>
-          </p:cNvSpPr>
-          <p:nvPr>
-            <p:ph type="title"/>
-          </p:nvPr>
-        </p:nvSpPr>
-        <p:spPr/>
-        <p:txBody>
-          <a:bodyPr/>
-          <a:lstStyle/>
-          <a:p>
-            <a:pPr marL="0" indent="0">
-              <a:buNone/>
-            </a:pPr>
-            <a:r>
-              <a:rPr lang="es-CO">
-                <a:latin typeface="Bariol" panose="02000506040000020003" pitchFamily="50" charset="0"/>
-              </a:rPr>
-              <a:t>Generar el Reporte SOX</a:t>
-            </a:r>
-          </a:p>
-        </p:txBody>
-      </p:sp>
-      <p:sp>
-        <p:nvSpPr>
-          <p:cNvPr id="6" name="Marcador de contenido 5">
-            <a:extLst>
-              <a:ext uri="{FF2B5EF4-FFF2-40B4-BE49-F238E27FC236}">
-                <a16:creationId xmlns:a16="http://schemas.microsoft.com/office/drawing/2014/main" id="{CC548DBE-0DFE-E86D-5A1F-A784E6CA2790}"/>
-              </a:ext>
-            </a:extLst>
-          </p:cNvPr>
-          <p:cNvSpPr>
-            <a:spLocks noGrp="1"/>
-          </p:cNvSpPr>
-          <p:nvPr>
-            <p:ph type="body" sz="quarter" idx="4294967295"/>
-          </p:nvPr>
-        </p:nvSpPr>
-        <p:spPr>
-          <a:xfrm>
-            <a:off x="514350" y="1600000"/>
-            <a:ext cx="5650000" cy="4950000"/>
-          </a:xfrm>
-        </p:spPr>
-        <p:txBody>
-          <a:bodyPr>
-            <a:normAutofit/>
-          </a:bodyPr>
-          <a:lstStyle/>
-          <a:p>
-            <a:pPr marL="0" indent="0">
-              <a:spcBef>
-                <a:spcPts val="600"/>
-              </a:spcBef>
-              <a:buNone/>
-            </a:pPr>
-            <a:r>
-              <a:rPr lang="es-CO" sz="1800" b="1"/>
-              <a:t>Cómo generarlo</a:t>
-            </a:r>
-          </a:p>
-          <a:p>
-            <a:pPr marL="357188" indent="-357188">
-              <a:spcBef>
-                <a:spcPts val="600"/>
-              </a:spcBef>
-              <a:buFont typeface="+mj-lt"/>
-              <a:buAutoNum type="arabicPeriod"/>
-            </a:pPr>
-            <a:r>
-              <a:rPr lang="es-CO" sz="1500"/>
-              <a:t>Entra a Control SOX y luego a HUB.PPE.01 Creacion de Activos Fijos.</a:t>
-            </a:r>
-          </a:p>
-          <a:p>
-            <a:pPr marL="357188" indent="-357188">
-              <a:spcBef>
-                <a:spcPts val="600"/>
-              </a:spcBef>
-              <a:buFont typeface="+mj-lt"/>
-              <a:buAutoNum type="arabicPeriod"/>
-            </a:pPr>
-            <a:r>
-              <a:rPr lang="es-CO" sz="1500"/>
-              <a:t>Elige la sociedad y las fechas Desde y Hasta.</a:t>
-            </a:r>
-          </a:p>
-          <a:p>
-            <a:pPr marL="357188" indent="-357188">
-              <a:spcBef>
-                <a:spcPts val="600"/>
-              </a:spcBef>
-              <a:buFont typeface="+mj-lt"/>
-              <a:buAutoNum type="arabicPeriod"/>
-            </a:pPr>
-            <a:r>
-              <a:rPr lang="es-CO" sz="1500"/>
-              <a:t>Pulsa Generar Reporte SOX.</a:t>
-            </a:r>
-          </a:p>
-          <a:p>
-            <a:pPr marL="0" indent="0">
-              <a:spcBef>
-                <a:spcPts val="600"/>
-              </a:spcBef>
-              <a:buNone/>
-            </a:pPr>
-            <a:r>
-              <a:rPr lang="es-CO" sz="1800" b="1"/>
-              <a:t>Qué tener en cuenta</a:t>
-            </a:r>
-          </a:p>
-          <a:p>
-            <a:pPr marL="274638" indent="-274638">
-              <a:spcBef>
-                <a:spcPts val="500"/>
-              </a:spcBef>
-              <a:buFont typeface="Arial"/>
-              <a:buChar char="•"/>
-            </a:pPr>
-            <a:r>
-              <a:rPr lang="es-CO" sz="1500"/>
-              <a:t>SAP debe estar abierto y con tu sesion iniciada.</a:t>
-            </a:r>
-          </a:p>
-          <a:p>
-            <a:pPr marL="274638" indent="-274638">
-              <a:spcBef>
-                <a:spcPts val="500"/>
-              </a:spcBef>
-              <a:buFont typeface="Arial"/>
-              <a:buChar char="•"/>
-            </a:pPr>
-            <a:r>
-              <a:rPr lang="es-CO" sz="1500"/>
-              <a:t>La fecha Hasta no puede ser anterior a la fecha Desde.</a:t>
-            </a:r>
-          </a:p>
-          <a:p>
-            <a:pPr marL="274638" indent="-274638">
-              <a:spcBef>
-                <a:spcPts val="500"/>
-              </a:spcBef>
-              <a:buFont typeface="Arial"/>
-              <a:buChar char="•"/>
-            </a:pPr>
-            <a:r>
-              <a:rPr lang="es-CO" sz="1500"/>
-              <a:t>La aplicacion toma capturas como evidencia; dejala trabajar.</a:t>
-            </a:r>
-          </a:p>
-        </p:txBody>
-      </p:sp>
-      <p:sp>
-        <p:nvSpPr>
-          <p:cNvPr id="8" name="Marcador de número de diapositiva 7">
-            <a:extLst>
-              <a:ext uri="{FF2B5EF4-FFF2-40B4-BE49-F238E27FC236}">
-                <a16:creationId xmlns:a16="http://schemas.microsoft.com/office/drawing/2014/main" id="{DF45772F-1BFC-EC1A-DFB5-9468420C58B2}"/>
-              </a:ext>
-            </a:extLst>
-          </p:cNvPr>
-          <p:cNvSpPr>
-            <a:spLocks noGrp="1"/>
-          </p:cNvSpPr>
-          <p:nvPr>
-            <p:ph type="sldNum" sz="quarter" idx="4"/>
-          </p:nvPr>
-        </p:nvSpPr>
-        <p:spPr/>
-        <p:txBody>
-          <a:bodyPr/>
-          <a:lstStyle/>
-          <a:p>
-            <a:fld id="{F6EB29E3-579C-284A-BB93-B47AD62E130B}" type="slidenum">
-              <a:rPr lang="es-ES_tradnl" smtClean="0"/>
-              <a:pPr/>
-              <a:t>6</a:t>
-            </a:fld>
-            <a:endParaRPr lang="es-ES_tradnl" sz="1000"/>
-          </a:p>
-        </p:txBody>
-      </p:sp>
-      <p:pic>
-        <p:nvPicPr>
-          <p:cNvPr id="11" name="Imagen 10" descr="Imagen que contiene Interfaz de usuario gráfica  El contenido generado por IA puede ser incorrecto.">
-            <a:extLst>
-              <a:ext uri="{FF2B5EF4-FFF2-40B4-BE49-F238E27FC236}">
-                <a16:creationId xmlns:a16="http://schemas.microsoft.com/office/drawing/2014/main" id="{E08CBAE9-8F59-4A66-BF92-6EB54FBC4CF6}"/>
-              </a:ext>
-            </a:extLst>
-          </p:cNvPr>
-          <p:cNvPicPr>
-            <a:picLocks noChangeAspect="1"/>
-          </p:cNvPicPr>
-          <p:nvPr/>
-        </p:nvPicPr>
-        <p:blipFill>
-          <a:blip r:embed="rId2"/>
-          <a:stretch>
-            <a:fillRect/>
-          </a:stretch>
-        </p:blipFill>
-        <p:spPr>
-          <a:xfrm flipH="1">
-            <a:off x="5982230" y="1539071"/>
-            <a:ext cx="9919503" cy="5574074"/>
-          </a:xfrm>
-          <a:prstGeom prst="rect">
-            <a:avLst/>
-          </a:prstGeom>
-        </p:spPr>
-      </p:pic>
-      <p:sp>
-        <p:nvSpPr>
-          <p:cNvPr id="13" name="Marcador de contenido 5">
-            <a:extLst>
-              <a:ext uri="{FF2B5EF4-FFF2-40B4-BE49-F238E27FC236}">
-                <a16:creationId xmlns:a16="http://schemas.microsoft.com/office/drawing/2014/main" id="{A8E9447D-30F7-EABE-AB32-0F97778CA18C}"/>
-              </a:ext>
-            </a:extLst>
-          </p:cNvPr>
-          <p:cNvSpPr txBox="1">
-            <a:spLocks/>
-          </p:cNvSpPr>
-          <p:nvPr/>
-        </p:nvSpPr>
-        <p:spPr>
-          <a:xfrm>
-            <a:off x="6300000" y="1700000"/>
-            <a:ext cx="5350000" cy="4700000"/>
-          </a:xfrm>
-          <a:prstGeom prst="rect">
-            <a:avLst/>
-          </a:prstGeom>
-        </p:spPr>
-        <p:txBody>
-          <a:bodyPr/>
-          <a:lstStyle/>
-          <a:p>
-            <a:pPr marL="0" indent="0">
-              <a:buNone/>
-            </a:pPr>
-            <a:endParaRPr lang="es-CO"/>
-          </a:p>
-        </p:txBody>
-      </p:sp>
-    </p:spTree>
-    <p:extLst>
-      <p:ext uri="{BB962C8B-B14F-4D97-AF65-F5344CB8AC3E}">
-        <p14:creationId xmlns:p14="http://schemas.microsoft.com/office/powerpoint/2010/main" val="1615763616"/>
-      </p:ext>
-    </p:extLst>
-  </p:cSld>
-  <p:clrMapOvr>
-    <a:masterClrMapping/>
-  </p:clrMapOvr>
-  <mc:AlternateContent xmlns:mc="http://schemas.openxmlformats.org/markup-compatibility/2006" xmlns:p14="http://schemas.microsoft.com/office/powerpoint/2010/main">
-    <mc:Choice Requires="p14">
-      <p:transition p14:dur="350">
-        <p:fade/>
-      </p:transition>
-    </mc:Choice>
-    <mc:Fallback xmlns="">
-      <p:transition>
-        <p:fade/>
-      </p:transition>
-    </mc:Fallback>
-  </mc:AlternateContent>
-</p:sld>
-</file>
-
-<file path=ppt/slides/slide18.xml><?xml version="1.0" encoding="utf-8"?>
-<p:sld xmlns:a="http://schemas.openxmlformats.org/drawingml/2006/main" xmlns:r="http://schemas.openxmlformats.org/officeDocument/2006/relationships" xmlns:p="http://schemas.openxmlformats.org/presentationml/2006/main">
-  <p:cSld>
-    <p:spTree>
-      <p:nvGrpSpPr>
-        <p:cNvPr id="1" name=""/>
-        <p:cNvGrpSpPr/>
-        <p:nvPr/>
-      </p:nvGrpSpPr>
-      <p:grpSpPr>
-        <a:xfrm>
-          <a:off x="0" y="0"/>
-          <a:ext cx="0" cy="0"/>
-          <a:chOff x="0" y="0"/>
-          <a:chExt cx="0" cy="0"/>
-        </a:xfrm>
-      </p:grpSpPr>
-      <p:sp>
-        <p:nvSpPr>
-          <p:cNvPr id="2" name="Marcador de número de diapositiva 1">
-            <a:extLst>
-              <a:ext uri="{FF2B5EF4-FFF2-40B4-BE49-F238E27FC236}">
-                <a16:creationId xmlns:a16="http://schemas.microsoft.com/office/drawing/2014/main" id="{C71B1FE5-49E8-305C-67AA-2EEDB30201D0}"/>
-              </a:ext>
-            </a:extLst>
-          </p:cNvPr>
-          <p:cNvSpPr>
-            <a:spLocks noGrp="1"/>
-          </p:cNvSpPr>
-          <p:nvPr>
-            <p:ph type="sldNum" sz="quarter" idx="4"/>
-          </p:nvPr>
-        </p:nvSpPr>
-        <p:spPr/>
-        <p:txBody>
-          <a:bodyPr/>
-          <a:lstStyle/>
-          <a:p>
-            <a:fld id="{F6EB29E3-579C-284A-BB93-B47AD62E130B}" type="slidenum">
-              <a:rPr lang="es-ES_tradnl" smtClean="0"/>
-              <a:pPr/>
-              <a:t>7</a:t>
-            </a:fld>
-            <a:endParaRPr lang="es-ES_tradnl" sz="1000"/>
-          </a:p>
-        </p:txBody>
-      </p:sp>
-      <p:pic>
-        <p:nvPicPr>
-          <p:cNvPr id="6" name="Imagen 5" descr="Imagen que contiene Icono  El contenido generado por IA puede ser incorrecto.">
-            <a:extLst>
-              <a:ext uri="{FF2B5EF4-FFF2-40B4-BE49-F238E27FC236}">
-                <a16:creationId xmlns:a16="http://schemas.microsoft.com/office/drawing/2014/main" id="{E4B9A577-EBFE-9667-84DD-2AFE7364992F}"/>
-              </a:ext>
-            </a:extLst>
-          </p:cNvPr>
-          <p:cNvPicPr>
-            <a:picLocks noChangeAspect="1"/>
-          </p:cNvPicPr>
-          <p:nvPr/>
-        </p:nvPicPr>
-        <p:blipFill>
-          <a:blip r:embed="rId2"/>
-          <a:stretch>
-            <a:fillRect/>
-          </a:stretch>
-        </p:blipFill>
-        <p:spPr>
-          <a:xfrm>
-            <a:off x="1" y="0"/>
-            <a:ext cx="12191999" cy="6858000"/>
-          </a:xfrm>
-          <a:prstGeom prst="rect">
-            <a:avLst/>
-          </a:prstGeom>
-        </p:spPr>
-      </p:pic>
-      <p:pic>
-        <p:nvPicPr>
-          <p:cNvPr id="17" name="Imagen 16" descr="Imagen que contiene Logotipo  El contenido generado por IA puede ser incorrecto.">
-            <a:extLst>
-              <a:ext uri="{FF2B5EF4-FFF2-40B4-BE49-F238E27FC236}">
-                <a16:creationId xmlns:a16="http://schemas.microsoft.com/office/drawing/2014/main" id="{5D21599D-3D35-3676-8EF4-70E5A2CA8A2C}"/>
-              </a:ext>
-            </a:extLst>
-          </p:cNvPr>
-          <p:cNvPicPr>
-            <a:picLocks noChangeAspect="1"/>
-          </p:cNvPicPr>
-          <p:nvPr/>
-        </p:nvPicPr>
-        <p:blipFill>
-          <a:blip r:embed="rId3"/>
-          <a:stretch>
-            <a:fillRect/>
-          </a:stretch>
-        </p:blipFill>
-        <p:spPr>
-          <a:xfrm>
-            <a:off x="10804414" y="333377"/>
-            <a:ext cx="1052621" cy="610520"/>
-          </a:xfrm>
-          <a:prstGeom prst="rect">
-            <a:avLst/>
-          </a:prstGeom>
-        </p:spPr>
-      </p:pic>
-      <p:sp>
-        <p:nvSpPr>
-          <p:cNvPr id="3" name="Título 1">
-            <a:extLst>
-              <a:ext uri="{FF2B5EF4-FFF2-40B4-BE49-F238E27FC236}">
-                <a16:creationId xmlns:a16="http://schemas.microsoft.com/office/drawing/2014/main" id="{2AFF411C-EAE9-D636-A7E7-953F8AF03868}"/>
-              </a:ext>
-            </a:extLst>
-          </p:cNvPr>
-          <p:cNvSpPr>
-            <a:spLocks noGrp="1"/>
-          </p:cNvSpPr>
-          <p:nvPr>
-            <p:ph type="title"/>
-          </p:nvPr>
-        </p:nvSpPr>
-        <p:spPr>
-          <a:xfrm>
-            <a:off x="949651" y="300000"/>
-            <a:ext cx="9200000" cy="1150000"/>
-          </a:xfrm>
-        </p:spPr>
-        <p:txBody>
-          <a:bodyPr/>
-          <a:lstStyle/>
-          <a:p>
-            <a:pPr marL="0" indent="0">
-              <a:buNone/>
-            </a:pPr>
-            <a:r>
-              <a:rPr lang="es-CO">
-                <a:latin typeface="Bariol" panose="02000506040000020003" pitchFamily="50" charset="0"/>
-              </a:rPr>
-              <a:t>Paso 3 · Consultar los activos creados</a:t>
-            </a:r>
-          </a:p>
-        </p:txBody>
-      </p:sp>
-      <p:sp>
-        <p:nvSpPr>
-          <p:cNvPr id="4" name="Marcador de texto 2">
-            <a:extLst>
-              <a:ext uri="{FF2B5EF4-FFF2-40B4-BE49-F238E27FC236}">
-                <a16:creationId xmlns:a16="http://schemas.microsoft.com/office/drawing/2014/main" id="{D88E0A4A-9D10-5EF8-47B7-D7EA37060660}"/>
-              </a:ext>
-            </a:extLst>
-          </p:cNvPr>
-          <p:cNvSpPr txBox="1">
-            <a:spLocks/>
-          </p:cNvSpPr>
-          <p:nvPr/>
-        </p:nvSpPr>
-        <p:spPr>
-          <a:xfrm>
-            <a:off x="949651" y="1620000"/>
-            <a:ext cx="7650000" cy="4600000"/>
-          </a:xfrm>
-          <a:prstGeom prst="rect">
-            <a:avLst/>
-          </a:prstGeom>
-        </p:spPr>
-        <p:txBody>
-          <a:bodyPr>
-            <a:normAutofit/>
-          </a:bodyPr>
-          <a:lstStyle/>
-          <a:p>
-            <a:pPr marL="0" indent="0">
-              <a:buNone/>
-            </a:pPr>
-            <a:r>
-              <a:rPr lang="es-CO"/>
-              <a:t>Pulsa Extraer Activos Creados, escribe tu usuario de SAP y pulsa Ejecutar.</a:t>
-            </a:r>
-          </a:p>
-          <a:p>
-            <a:pPr marL="0" indent="0">
-              <a:spcBef>
-                <a:spcPts val="600"/>
-              </a:spcBef>
-              <a:buNone/>
-            </a:pPr>
-            <a:r>
-              <a:rPr lang="es-CO"/>
-              <a:t>La aplicacion consulta en SAP los activos que se crearon y genera un archivo de Excel con el listado y el numero de cada activo.</a:t>
-            </a:r>
-          </a:p>
-          <a:p>
-            <a:pPr marL="0" indent="0">
-              <a:spcBef>
-                <a:spcPts val="600"/>
-              </a:spcBef>
-              <a:buNone/>
-            </a:pPr>
-            <a:r>
-              <a:rPr lang="es-CO"/>
-              <a:t>Es la forma rapida de confirmar que se registro y tener el soporte a la mano.</a:t>
-            </a:r>
-          </a:p>
-        </p:txBody>
-      </p:sp>
-    </p:spTree>
-    <p:extLst>
-      <p:ext uri="{BB962C8B-B14F-4D97-AF65-F5344CB8AC3E}">
-        <p14:creationId xmlns:p14="http://schemas.microsoft.com/office/powerpoint/2010/main" val="4030836509"/>
-      </p:ext>
-    </p:extLst>
-  </p:cSld>
-  <p:clrMapOvr>
-    <a:masterClrMapping/>
-  </p:clrMapOvr>
-  <mc:AlternateContent xmlns:mc="http://schemas.openxmlformats.org/markup-compatibility/2006" xmlns:p14="http://schemas.microsoft.com/office/powerpoint/2010/main">
-    <mc:Choice Requires="p14">
-      <p:transition p14:dur="350">
-        <p:fade/>
-      </p:transition>
-    </mc:Choice>
-    <mc:Fallback xmlns="">
-      <p:transition>
-        <p:fade/>
-      </p:transition>
-    </mc:Fallback>
-  </mc:AlternateContent>
-</p:sld>
-</file>
-
-<file path=ppt/slides/slide19.xml><?xml version="1.0" encoding="utf-8"?>
-<p:sld xmlns:a="http://schemas.openxmlformats.org/drawingml/2006/main" xmlns:r="http://schemas.openxmlformats.org/officeDocument/2006/relationships" xmlns:p="http://schemas.openxmlformats.org/presentationml/2006/main">
-  <p:cSld>
-    <p:spTree>
-      <p:nvGrpSpPr>
-        <p:cNvPr id="1" name=""/>
-        <p:cNvGrpSpPr/>
-        <p:nvPr/>
-      </p:nvGrpSpPr>
-      <p:grpSpPr>
-        <a:xfrm>
-          <a:off x="0" y="0"/>
-          <a:ext cx="0" cy="0"/>
-          <a:chOff x="0" y="0"/>
-          <a:chExt cx="0" cy="0"/>
-        </a:xfrm>
-      </p:grpSpPr>
-      <p:sp>
-        <p:nvSpPr>
-          <p:cNvPr id="2" name="Marcador de número de diapositiva 1">
-            <a:extLst>
-              <a:ext uri="{FF2B5EF4-FFF2-40B4-BE49-F238E27FC236}">
-                <a16:creationId xmlns:a16="http://schemas.microsoft.com/office/drawing/2014/main" id="{DEA09B1E-6BAE-95BB-0BBF-123CF2C891BA}"/>
-              </a:ext>
-            </a:extLst>
-          </p:cNvPr>
-          <p:cNvSpPr>
-            <a:spLocks noGrp="1"/>
-          </p:cNvSpPr>
-          <p:nvPr>
-            <p:ph type="sldNum" sz="quarter" idx="4"/>
-          </p:nvPr>
-        </p:nvSpPr>
-        <p:spPr/>
-        <p:txBody>
-          <a:bodyPr/>
-          <a:lstStyle/>
-          <a:p>
-            <a:fld id="{F6EB29E3-579C-284A-BB93-B47AD62E130B}" type="slidenum">
-              <a:rPr lang="es-ES_tradnl" smtClean="0"/>
-              <a:pPr/>
-              <a:t>8</a:t>
-            </a:fld>
-            <a:endParaRPr lang="es-ES_tradnl" sz="1000"/>
-          </a:p>
-        </p:txBody>
-      </p:sp>
-      <p:pic>
-        <p:nvPicPr>
-          <p:cNvPr id="8" name="Imagen 7" descr="Imagen que contiene Icono  El contenido generado por IA puede ser incorrecto.">
-            <a:extLst>
-              <a:ext uri="{FF2B5EF4-FFF2-40B4-BE49-F238E27FC236}">
-                <a16:creationId xmlns:a16="http://schemas.microsoft.com/office/drawing/2014/main" id="{FD870812-987C-D46A-56A5-567719FA0FBA}"/>
-              </a:ext>
-            </a:extLst>
-          </p:cNvPr>
-          <p:cNvPicPr>
-            <a:picLocks noChangeAspect="1"/>
-          </p:cNvPicPr>
-          <p:nvPr/>
-        </p:nvPicPr>
-        <p:blipFill>
-          <a:blip r:embed="rId2"/>
-          <a:stretch>
-            <a:fillRect/>
-          </a:stretch>
-        </p:blipFill>
-        <p:spPr>
-          <a:xfrm>
-            <a:off x="1" y="0"/>
-            <a:ext cx="12191999" cy="6858000"/>
-          </a:xfrm>
-          <a:prstGeom prst="rect">
-            <a:avLst/>
-          </a:prstGeom>
-        </p:spPr>
-      </p:pic>
-      <p:pic>
-        <p:nvPicPr>
-          <p:cNvPr id="9" name="Imagen 8" descr="Logotipo  El contenido generado por IA puede ser incorrecto.">
-            <a:extLst>
-              <a:ext uri="{FF2B5EF4-FFF2-40B4-BE49-F238E27FC236}">
-                <a16:creationId xmlns:a16="http://schemas.microsoft.com/office/drawing/2014/main" id="{6948155E-6163-E469-7243-84A46C29CF3C}"/>
-              </a:ext>
-            </a:extLst>
-          </p:cNvPr>
-          <p:cNvPicPr>
-            <a:picLocks noChangeAspect="1"/>
-          </p:cNvPicPr>
-          <p:nvPr/>
-        </p:nvPicPr>
-        <p:blipFill>
-          <a:blip r:embed="rId3"/>
-          <a:stretch>
-            <a:fillRect/>
-          </a:stretch>
-        </p:blipFill>
-        <p:spPr>
-          <a:xfrm>
-            <a:off x="10804414" y="333378"/>
-            <a:ext cx="1053147" cy="610520"/>
-          </a:xfrm>
-          <a:prstGeom prst="rect">
-            <a:avLst/>
-          </a:prstGeom>
-        </p:spPr>
-      </p:pic>
-      <p:sp>
-        <p:nvSpPr>
-          <p:cNvPr id="3" name="Título 1">
-            <a:extLst>
-              <a:ext uri="{FF2B5EF4-FFF2-40B4-BE49-F238E27FC236}">
-                <a16:creationId xmlns:a16="http://schemas.microsoft.com/office/drawing/2014/main" id="{AD0FC757-D97E-0DF1-ED2B-AE9100758E79}"/>
-              </a:ext>
-            </a:extLst>
-          </p:cNvPr>
-          <p:cNvSpPr>
-            <a:spLocks noGrp="1"/>
-          </p:cNvSpPr>
-          <p:nvPr>
-            <p:ph type="title"/>
-          </p:nvPr>
-        </p:nvSpPr>
-        <p:spPr>
-          <a:xfrm>
-            <a:off x="4670617" y="-482471"/>
-            <a:ext cx="7000000" cy="2852737"/>
-          </a:xfrm>
-        </p:spPr>
-        <p:txBody>
-          <a:bodyPr/>
-          <a:lstStyle/>
-          <a:p>
-            <a:pPr marL="0" indent="0">
-              <a:buNone/>
-            </a:pPr>
-            <a:r>
-              <a:rPr lang="es-CO" sz="3200">
-                <a:solidFill>
-                  <a:schemeClr val="bg1"/>
-                </a:solidFill>
-                <a:latin typeface="Bariol" panose="02000506040000020003" pitchFamily="50" charset="0"/>
-              </a:rPr>
-              <a:t>Paso 4 · Subir los anexos</a:t>
-            </a:r>
-          </a:p>
-        </p:txBody>
-      </p:sp>
-      <p:sp>
-        <p:nvSpPr>
-          <p:cNvPr id="5" name="Subtítulo 2">
-            <a:extLst>
-              <a:ext uri="{FF2B5EF4-FFF2-40B4-BE49-F238E27FC236}">
-                <a16:creationId xmlns:a16="http://schemas.microsoft.com/office/drawing/2014/main" id="{909C0CE7-C067-0659-3393-EE588C294EF6}"/>
-              </a:ext>
-            </a:extLst>
-          </p:cNvPr>
-          <p:cNvSpPr txBox="1">
-            <a:spLocks/>
-          </p:cNvSpPr>
-          <p:nvPr/>
-        </p:nvSpPr>
-        <p:spPr>
-          <a:xfrm>
-            <a:off x="4670617" y="2476783"/>
-            <a:ext cx="7146172" cy="4100000"/>
-          </a:xfrm>
-          <a:prstGeom prst="rect">
-            <a:avLst/>
-          </a:prstGeom>
-        </p:spPr>
-        <p:txBody>
-          <a:bodyPr>
-            <a:normAutofit/>
-          </a:bodyPr>
-          <a:lstStyle/>
-          <a:p>
-            <a:pPr marL="0" indent="0">
-              <a:buNone/>
-            </a:pPr>
-            <a:r>
-              <a:rPr lang="es-CO">
-                <a:solidFill>
-                  <a:schemeClr val="bg1"/>
-                </a:solidFill>
-              </a:rPr>
-              <a:t>Pulsa Subir Anexos, elige la sociedad y selecciona los documentos que quieres adjuntar.</a:t>
-            </a:r>
-          </a:p>
-          <a:p>
-            <a:pPr marL="0" indent="0">
-              <a:spcBef>
-                <a:spcPts val="600"/>
-              </a:spcBef>
-              <a:buNone/>
-            </a:pPr>
-            <a:r>
-              <a:rPr lang="es-CO">
-                <a:solidFill>
-                  <a:schemeClr val="bg1"/>
-                </a:solidFill>
-              </a:rPr>
-              <a:t>La aplicacion toma el listado de activos creados y adjunta cada documento a cada activo en SAP, uno por uno.</a:t>
-            </a:r>
-          </a:p>
-          <a:p>
-            <a:pPr marL="0" indent="0">
-              <a:spcBef>
-                <a:spcPts val="600"/>
-              </a:spcBef>
-              <a:buNone/>
-            </a:pPr>
-            <a:r>
-              <a:rPr lang="es-CO">
-                <a:solidFill>
-                  <a:schemeClr val="bg1"/>
-                </a:solidFill>
-              </a:rPr>
-              <a:t>Si hay muchos activos el proceso es largo: dejalo trabajar sin interrupciones.</a:t>
-            </a:r>
-          </a:p>
-          <a:p>
-            <a:pPr marL="0" indent="0">
-              <a:spcBef>
-                <a:spcPts val="600"/>
-              </a:spcBef>
-              <a:buNone/>
-            </a:pPr>
-            <a:r>
-              <a:rPr lang="es-CO" b="1">
-                <a:solidFill>
-                  <a:schemeClr val="bg1"/>
-                </a:solidFill>
-              </a:rPr>
-              <a:t>Al final veras un resumen de cuantos se subieron correctamente.</a:t>
-            </a:r>
-          </a:p>
-        </p:txBody>
-      </p:sp>
-    </p:spTree>
-    <p:extLst>
-      <p:ext uri="{BB962C8B-B14F-4D97-AF65-F5344CB8AC3E}">
-        <p14:creationId xmlns:p14="http://schemas.microsoft.com/office/powerpoint/2010/main" val="590287769"/>
       </p:ext>
     </p:extLst>
   </p:cSld>
@@ -8852,7 +8906,7 @@
         <p:cNvPr id="1" name="">
           <a:extLst>
             <a:ext uri="{FF2B5EF4-FFF2-40B4-BE49-F238E27FC236}">
-              <a16:creationId xmlns:a16="http://schemas.microsoft.com/office/drawing/2014/main" id="{BFBEEA20-501C-CA4D-B024-ACD67457C873}"/>
+              <a16:creationId xmlns:a16="http://schemas.microsoft.com/office/drawing/2014/main" id="{1A689B8B-7DDE-8534-B66D-13E2691DEE8A}"/>
             </a:ext>
           </a:extLst>
         </p:cNvPr>
@@ -8867,12 +8921,218 @@
           <a:chExt cx="0" cy="0"/>
         </a:xfrm>
       </p:grpSpPr>
+      <p:sp>
+        <p:nvSpPr>
+          <p:cNvPr id="5" name="Título 4">
+            <a:extLst>
+              <a:ext uri="{FF2B5EF4-FFF2-40B4-BE49-F238E27FC236}">
+                <a16:creationId xmlns:a16="http://schemas.microsoft.com/office/drawing/2014/main" id="{716A16E2-6542-47AB-CB5A-AA1A42C8F968}"/>
+              </a:ext>
+            </a:extLst>
+          </p:cNvPr>
+          <p:cNvSpPr>
+            <a:spLocks noGrp="1"/>
+          </p:cNvSpPr>
+          <p:nvPr>
+            <p:ph type="title"/>
+          </p:nvPr>
+        </p:nvSpPr>
+        <p:spPr/>
+        <p:txBody>
+          <a:bodyPr/>
+          <a:lstStyle/>
+          <a:p>
+            <a:pPr marL="0" indent="0">
+              <a:buNone/>
+            </a:pPr>
+            <a:r>
+              <a:rPr lang="es-CO">
+                <a:latin typeface="Bariol" panose="02000506040000020003" pitchFamily="50" charset="0"/>
+              </a:rPr>
+              <a:t>¿Qué puedes hacer con ella?</a:t>
+            </a:r>
+          </a:p>
+        </p:txBody>
+      </p:sp>
+      <p:sp>
+        <p:nvSpPr>
+          <p:cNvPr id="6" name="Marcador de contenido 5">
+            <a:extLst>
+              <a:ext uri="{FF2B5EF4-FFF2-40B4-BE49-F238E27FC236}">
+                <a16:creationId xmlns:a16="http://schemas.microsoft.com/office/drawing/2014/main" id="{CC548DBE-0DFE-E86D-5A1F-A784E6CA2790}"/>
+              </a:ext>
+            </a:extLst>
+          </p:cNvPr>
+          <p:cNvSpPr>
+            <a:spLocks noGrp="1"/>
+          </p:cNvSpPr>
+          <p:nvPr>
+            <p:ph type="body" sz="quarter" idx="4294967295"/>
+          </p:nvPr>
+        </p:nvSpPr>
+        <p:spPr>
+          <a:xfrm>
+            <a:off x="514350" y="1600000"/>
+            <a:ext cx="5650000" cy="4950000"/>
+          </a:xfrm>
+        </p:spPr>
+        <p:txBody>
+          <a:bodyPr>
+            <a:normAutofit/>
+          </a:bodyPr>
+          <a:lstStyle/>
+          <a:p>
+            <a:pPr marL="0" indent="0">
+              <a:spcBef>
+                <a:spcPts val="600"/>
+              </a:spcBef>
+              <a:buNone/>
+            </a:pPr>
+            <a:r>
+              <a:rPr lang="es-CO" sz="1800" b="1"/>
+              <a:t>Activos Fijos</a:t>
+            </a:r>
+          </a:p>
+          <a:p>
+            <a:pPr marL="274638" indent="-274638">
+              <a:spcBef>
+                <a:spcPts val="500"/>
+              </a:spcBef>
+              <a:buFont typeface="Arial"/>
+              <a:buChar char="•"/>
+            </a:pPr>
+            <a:r>
+              <a:rPr lang="es-CO" sz="1500"/>
+              <a:t>Extraer la información para SAP.</a:t>
+            </a:r>
+          </a:p>
+          <a:p>
+            <a:pPr marL="274638" indent="-274638">
+              <a:spcBef>
+                <a:spcPts val="500"/>
+              </a:spcBef>
+              <a:buFont typeface="Arial"/>
+              <a:buChar char="•"/>
+            </a:pPr>
+            <a:r>
+              <a:rPr lang="es-CO" sz="1500"/>
+              <a:t>Crear el activo automáticamente en SAP.</a:t>
+            </a:r>
+          </a:p>
+          <a:p>
+            <a:pPr marL="274638" indent="-274638">
+              <a:spcBef>
+                <a:spcPts val="500"/>
+              </a:spcBef>
+              <a:buFont typeface="Arial"/>
+              <a:buChar char="•"/>
+            </a:pPr>
+            <a:r>
+              <a:rPr lang="es-CO" sz="1500"/>
+              <a:t>Consultar los activos ya creados.</a:t>
+            </a:r>
+          </a:p>
+          <a:p>
+            <a:pPr marL="274638" indent="-274638">
+              <a:spcBef>
+                <a:spcPts val="500"/>
+              </a:spcBef>
+              <a:buFont typeface="Arial"/>
+              <a:buChar char="•"/>
+            </a:pPr>
+            <a:r>
+              <a:rPr lang="es-CO" sz="1500"/>
+              <a:t>Adjuntar documentos de soporte a cada activo.</a:t>
+            </a:r>
+          </a:p>
+          <a:p>
+            <a:pPr marL="0" indent="0">
+              <a:spcBef>
+                <a:spcPts val="600"/>
+              </a:spcBef>
+              <a:buNone/>
+            </a:pPr>
+            <a:r>
+              <a:rPr lang="es-CO" sz="1800" b="1"/>
+              <a:t>Control SOX</a:t>
+            </a:r>
+          </a:p>
+          <a:p>
+            <a:pPr marL="274638" indent="-274638">
+              <a:spcBef>
+                <a:spcPts val="500"/>
+              </a:spcBef>
+              <a:buFont typeface="Arial"/>
+              <a:buChar char="•"/>
+            </a:pPr>
+            <a:r>
+              <a:rPr lang="es-CO" sz="1500"/>
+              <a:t>Generar el reporte de control con sus evidencias en un solo Excel.</a:t>
+            </a:r>
+          </a:p>
+          <a:p>
+            <a:pPr marL="0" indent="0">
+              <a:spcBef>
+                <a:spcPts val="600"/>
+              </a:spcBef>
+              <a:buNone/>
+            </a:pPr>
+            <a:r>
+              <a:rPr lang="es-CO" sz="1800" b="1"/>
+              <a:t>Reportes</a:t>
+            </a:r>
+          </a:p>
+          <a:p>
+            <a:pPr marL="274638" indent="-274638">
+              <a:spcBef>
+                <a:spcPts val="500"/>
+              </a:spcBef>
+              <a:buFont typeface="Arial"/>
+              <a:buChar char="•"/>
+            </a:pPr>
+            <a:r>
+              <a:rPr lang="es-CO" sz="1500"/>
+              <a:t>Módulo reservado para nuevas funciones a futuro.</a:t>
+            </a:r>
+          </a:p>
+        </p:txBody>
+      </p:sp>
+      <p:sp>
+        <p:nvSpPr>
+          <p:cNvPr id="8" name="Marcador de número de diapositiva 7">
+            <a:extLst>
+              <a:ext uri="{FF2B5EF4-FFF2-40B4-BE49-F238E27FC236}">
+                <a16:creationId xmlns:a16="http://schemas.microsoft.com/office/drawing/2014/main" id="{DF45772F-1BFC-EC1A-DFB5-9468420C58B2}"/>
+              </a:ext>
+            </a:extLst>
+          </p:cNvPr>
+          <p:cNvSpPr>
+            <a:spLocks noGrp="1"/>
+          </p:cNvSpPr>
+          <p:nvPr>
+            <p:ph type="sldNum" sz="quarter" idx="4"/>
+          </p:nvPr>
+        </p:nvSpPr>
+        <p:spPr/>
+        <p:txBody>
+          <a:bodyPr/>
+          <a:lstStyle/>
+          <a:p>
+            <a:fld id="{F6EB29E3-579C-284A-BB93-B47AD62E130B}" type="slidenum">
+              <a:rPr lang="es-ES_tradnl" smtClean="0"/>
+              <a:pPr/>
+              <a:t>3</a:t>
+            </a:fld>
+            <a:endParaRPr lang="es-ES_tradnl" sz="1000"/>
+          </a:p>
+        </p:txBody>
+      </p:sp>
       <p:pic>
         <p:nvPicPr>
-          <p:cNvPr id="15" name="Imagen 14" descr="Una persona con los brazos extendidos  El contenido generado por IA puede ser incorrecto.">
+          <p:cNvPr id="11" name="Imagen 10" descr="Imagen que contiene Interfaz de usuario gráfica  El contenido generado por IA puede ser incorrecto.">
             <a:extLst>
               <a:ext uri="{FF2B5EF4-FFF2-40B4-BE49-F238E27FC236}">
-                <a16:creationId xmlns:a16="http://schemas.microsoft.com/office/drawing/2014/main" id="{1B01B6F3-162D-F862-E092-2E3E1579C3A9}"/>
+                <a16:creationId xmlns:a16="http://schemas.microsoft.com/office/drawing/2014/main" id="{E08CBAE9-8F59-4A66-BF92-6EB54FBC4CF6}"/>
               </a:ext>
             </a:extLst>
           </p:cNvPr>
@@ -8888,110 +9148,53 @@
           </a:stretch>
         </p:blipFill>
         <p:spPr>
-          <a:xfrm>
-            <a:off x="0" y="0"/>
-            <a:ext cx="12191999" cy="6858000"/>
+          <a:xfrm flipH="1">
+            <a:off x="5982230" y="1539071"/>
+            <a:ext cx="9919503" cy="5574074"/>
           </a:xfrm>
           <a:prstGeom prst="rect">
             <a:avLst/>
           </a:prstGeom>
         </p:spPr>
       </p:pic>
-      <p:pic>
-        <p:nvPicPr>
-          <p:cNvPr id="12" name="Imagen 11" descr="Logotipo  El contenido generado por IA puede ser incorrecto.">
+      <p:sp>
+        <p:nvSpPr>
+          <p:cNvPr id="13" name="Marcador de contenido 5">
             <a:extLst>
               <a:ext uri="{FF2B5EF4-FFF2-40B4-BE49-F238E27FC236}">
-                <a16:creationId xmlns:a16="http://schemas.microsoft.com/office/drawing/2014/main" id="{9057F3FA-B26D-9645-B946-56A8A57917C7}"/>
+                <a16:creationId xmlns:a16="http://schemas.microsoft.com/office/drawing/2014/main" id="{A8E9447D-30F7-EABE-AB32-0F97778CA18C}"/>
               </a:ext>
             </a:extLst>
           </p:cNvPr>
-          <p:cNvPicPr>
-            <a:picLocks noChangeAspect="1"/>
-          </p:cNvPicPr>
+          <p:cNvSpPr txBox="1">
+            <a:spLocks/>
+          </p:cNvSpPr>
           <p:nvPr/>
-        </p:nvPicPr>
-        <p:blipFill>
-          <a:blip r:embed="rId3"/>
-          <a:stretch>
-            <a:fillRect/>
-          </a:stretch>
-        </p:blipFill>
-        <p:spPr>
-          <a:xfrm>
-            <a:off x="9380587" y="110082"/>
-            <a:ext cx="2749444" cy="1593881"/>
+        </p:nvSpPr>
+        <p:spPr>
+          <a:xfrm>
+            <a:off x="6300000" y="1700000"/>
+            <a:ext cx="5350000" cy="4700000"/>
           </a:xfrm>
           <a:prstGeom prst="rect">
             <a:avLst/>
           </a:prstGeom>
         </p:spPr>
-      </p:pic>
-      <p:sp>
-        <p:nvSpPr>
-          <p:cNvPr id="13" name="Título 1">
-            <a:extLst>
-              <a:ext uri="{FF2B5EF4-FFF2-40B4-BE49-F238E27FC236}">
-                <a16:creationId xmlns:a16="http://schemas.microsoft.com/office/drawing/2014/main" id="{C735EE70-BAB2-57BF-0EF8-DA2EB852106C}"/>
-              </a:ext>
-            </a:extLst>
-          </p:cNvPr>
-          <p:cNvSpPr txBox="1">
-            <a:spLocks/>
-          </p:cNvSpPr>
-          <p:nvPr/>
-        </p:nvSpPr>
-        <p:spPr>
-          <a:xfrm>
-            <a:off x="5300000" y="3450000"/>
-            <a:ext cx="6450000" cy="1950000"/>
-          </a:xfrm>
-          <a:prstGeom prst="rect">
-            <a:avLst/>
-          </a:prstGeom>
-        </p:spPr>
-        <p:txBody>
-          <a:bodyPr vert="horz" lIns="91440" tIns="45720" rIns="91440" bIns="45720" rtlCol="0" anchor="ctr" anchorCtr="0">
-            <a:noAutofit/>
-          </a:bodyPr>
+        <p:txBody>
+          <a:bodyPr/>
           <a:lstStyle/>
           <a:p>
             <a:pPr marL="0" indent="0">
               <a:buNone/>
             </a:pPr>
-            <a:r>
-              <a:rPr lang="es-CO" sz="6000">
-                <a:solidFill>
-                  <a:srgbClr val="FFFFFF"/>
-                </a:solidFill>
-                <a:latin typeface="Bariol" panose="02000506040000020003" pitchFamily="50" charset="0"/>
-              </a:rPr>
-              <a:t>Gestión de Activos Fijos</a:t>
-            </a:r>
-          </a:p>
-          <a:p>
-            <a:pPr marL="0" indent="0">
-              <a:spcBef>
-                <a:spcPts val="600"/>
-              </a:spcBef>
-              <a:buNone/>
-            </a:pPr>
-            <a:r>
-              <a:rPr lang="es-CO" sz="2000">
-                <a:solidFill>
-                  <a:srgbClr val="FFFFFF"/>
-                </a:solidFill>
-                <a:latin typeface="Bariol" panose="02000506040000020003" pitchFamily="50" charset="0"/>
-              </a:rPr>
-              <a:t>Guía de uso para el usuario</a:t>
-            </a:r>
+            <a:endParaRPr lang="es-CO"/>
           </a:p>
         </p:txBody>
       </p:sp>
     </p:spTree>
     <p:extLst>
       <p:ext uri="{BB962C8B-B14F-4D97-AF65-F5344CB8AC3E}">
-        <p14:creationId xmlns:p14="http://schemas.microsoft.com/office/powerpoint/2010/main" val="3136919188"/>
+        <p14:creationId xmlns:p14="http://schemas.microsoft.com/office/powerpoint/2010/main" val="1615763616"/>
       </p:ext>
     </p:extLst>
   </p:cSld>
@@ -9032,10 +9235,10 @@
       </p:grpSpPr>
       <p:sp>
         <p:nvSpPr>
-          <p:cNvPr id="2" name="Título 1">
+          <p:cNvPr id="2" name="Marcador de número de diapositiva 1">
             <a:extLst>
               <a:ext uri="{FF2B5EF4-FFF2-40B4-BE49-F238E27FC236}">
-                <a16:creationId xmlns:a16="http://schemas.microsoft.com/office/drawing/2014/main" id="{8E015669-66ED-D51F-0B8F-226AFFBCF523}"/>
+                <a16:creationId xmlns:a16="http://schemas.microsoft.com/office/drawing/2014/main" id="{DEA09B1E-6BAE-95BB-0BBF-123CF2C891BA}"/>
               </a:ext>
             </a:extLst>
           </p:cNvPr>
@@ -9043,7 +9246,7 @@
             <a:spLocks noGrp="1"/>
           </p:cNvSpPr>
           <p:nvPr>
-            <p:ph type="title"/>
+            <p:ph type="sldNum" sz="quarter" idx="4"/>
           </p:nvPr>
         </p:nvSpPr>
         <p:spPr/>
@@ -9051,24 +9254,81 @@
           <a:bodyPr/>
           <a:lstStyle/>
           <a:p>
-            <a:pPr marL="0" indent="0">
-              <a:buNone/>
-            </a:pPr>
-            <a:r>
-              <a:rPr lang="es-CO">
-                <a:latin typeface="Bariol" panose="02000506040000020003" pitchFamily="50" charset="0"/>
-              </a:rPr>
-              <a:t>Activos Fijos</a:t>
-            </a:r>
-          </a:p>
-        </p:txBody>
-      </p:sp>
-      <p:sp>
-        <p:nvSpPr>
-          <p:cNvPr id="3" name="Marcador de texto 2">
+            <a:fld id="{F6EB29E3-579C-284A-BB93-B47AD62E130B}" type="slidenum">
+              <a:rPr lang="es-ES_tradnl" smtClean="0"/>
+              <a:pPr/>
+              <a:t>4</a:t>
+            </a:fld>
+            <a:endParaRPr lang="es-ES_tradnl" sz="1000"/>
+          </a:p>
+        </p:txBody>
+      </p:sp>
+      <p:pic>
+        <p:nvPicPr>
+          <p:cNvPr id="8" name="Imagen 7" descr="Imagen que contiene Icono  El contenido generado por IA puede ser incorrecto.">
             <a:extLst>
               <a:ext uri="{FF2B5EF4-FFF2-40B4-BE49-F238E27FC236}">
-                <a16:creationId xmlns:a16="http://schemas.microsoft.com/office/drawing/2014/main" id="{42CAB150-398A-0BEF-B691-BF9A66542303}"/>
+                <a16:creationId xmlns:a16="http://schemas.microsoft.com/office/drawing/2014/main" id="{FD870812-987C-D46A-56A5-567719FA0FBA}"/>
+              </a:ext>
+            </a:extLst>
+          </p:cNvPr>
+          <p:cNvPicPr>
+            <a:picLocks noChangeAspect="1"/>
+          </p:cNvPicPr>
+          <p:nvPr/>
+        </p:nvPicPr>
+        <p:blipFill>
+          <a:blip r:embed="rId2"/>
+          <a:stretch>
+            <a:fillRect/>
+          </a:stretch>
+        </p:blipFill>
+        <p:spPr>
+          <a:xfrm>
+            <a:off x="1" y="0"/>
+            <a:ext cx="12191999" cy="6858000"/>
+          </a:xfrm>
+          <a:prstGeom prst="rect">
+            <a:avLst/>
+          </a:prstGeom>
+        </p:spPr>
+      </p:pic>
+      <p:pic>
+        <p:nvPicPr>
+          <p:cNvPr id="9" name="Imagen 8" descr="Logotipo  El contenido generado por IA puede ser incorrecto.">
+            <a:extLst>
+              <a:ext uri="{FF2B5EF4-FFF2-40B4-BE49-F238E27FC236}">
+                <a16:creationId xmlns:a16="http://schemas.microsoft.com/office/drawing/2014/main" id="{6948155E-6163-E469-7243-84A46C29CF3C}"/>
+              </a:ext>
+            </a:extLst>
+          </p:cNvPr>
+          <p:cNvPicPr>
+            <a:picLocks noChangeAspect="1"/>
+          </p:cNvPicPr>
+          <p:nvPr/>
+        </p:nvPicPr>
+        <p:blipFill>
+          <a:blip r:embed="rId3"/>
+          <a:stretch>
+            <a:fillRect/>
+          </a:stretch>
+        </p:blipFill>
+        <p:spPr>
+          <a:xfrm>
+            <a:off x="10804414" y="333378"/>
+            <a:ext cx="1053147" cy="610520"/>
+          </a:xfrm>
+          <a:prstGeom prst="rect">
+            <a:avLst/>
+          </a:prstGeom>
+        </p:spPr>
+      </p:pic>
+      <p:sp>
+        <p:nvSpPr>
+          <p:cNvPr id="3" name="Título 1">
+            <a:extLst>
+              <a:ext uri="{FF2B5EF4-FFF2-40B4-BE49-F238E27FC236}">
+                <a16:creationId xmlns:a16="http://schemas.microsoft.com/office/drawing/2014/main" id="{AD0FC757-D97E-0DF1-ED2B-AE9100758E79}"/>
               </a:ext>
             </a:extLst>
           </p:cNvPr>
@@ -9076,10 +9336,15 @@
             <a:spLocks noGrp="1"/>
           </p:cNvSpPr>
           <p:nvPr>
-            <p:ph type="body" idx="1"/>
+            <p:ph type="title"/>
           </p:nvPr>
         </p:nvSpPr>
-        <p:spPr/>
+        <p:spPr>
+          <a:xfrm>
+            <a:off x="4670617" y="-482471"/>
+            <a:ext cx="7000000" cy="2852737"/>
+          </a:xfrm>
+        </p:spPr>
         <p:txBody>
           <a:bodyPr/>
           <a:lstStyle/>
@@ -9088,38 +9353,123 @@
               <a:buNone/>
             </a:pPr>
             <a:r>
-              <a:rPr lang="es-CO"/>
-              <a:t>Crea activos en SAP, consulta los que se generaron y adjunta sus documentos de soporte.</a:t>
-            </a:r>
-          </a:p>
-        </p:txBody>
-      </p:sp>
-      <p:sp>
-        <p:nvSpPr>
-          <p:cNvPr id="4" name="Marcador de texto 3">
-            <a:extLst>
-              <a:ext uri="{FF2B5EF4-FFF2-40B4-BE49-F238E27FC236}">
-                <a16:creationId xmlns:a16="http://schemas.microsoft.com/office/drawing/2014/main" id="{A48A5407-45D9-3659-5333-5E8867BC1B6A}"/>
-              </a:ext>
-            </a:extLst>
-          </p:cNvPr>
-          <p:cNvSpPr>
-            <a:spLocks noGrp="1"/>
-          </p:cNvSpPr>
-          <p:nvPr>
-            <p:ph type="body" sz="quarter" idx="10"/>
-          </p:nvPr>
-        </p:nvSpPr>
-        <p:spPr/>
-        <p:txBody>
-          <a:bodyPr/>
-          <a:lstStyle/>
-          <a:p>
-            <a:r>
-              <a:rPr lang="es-CO">
+              <a:rPr lang="es-CO" sz="3200">
+                <a:solidFill>
+                  <a:schemeClr val="bg1"/>
+                </a:solidFill>
                 <a:latin typeface="Bariol" panose="02000506040000020003" pitchFamily="50" charset="0"/>
               </a:rPr>
-              <a:t>1</a:t>
+              <a:t>Antes de empezar</a:t>
+            </a:r>
+          </a:p>
+        </p:txBody>
+      </p:sp>
+      <p:sp>
+        <p:nvSpPr>
+          <p:cNvPr id="5" name="Subtítulo 2">
+            <a:extLst>
+              <a:ext uri="{FF2B5EF4-FFF2-40B4-BE49-F238E27FC236}">
+                <a16:creationId xmlns:a16="http://schemas.microsoft.com/office/drawing/2014/main" id="{909C0CE7-C067-0659-3393-EE588C294EF6}"/>
+              </a:ext>
+            </a:extLst>
+          </p:cNvPr>
+          <p:cNvSpPr txBox="1">
+            <a:spLocks/>
+          </p:cNvSpPr>
+          <p:nvPr/>
+        </p:nvSpPr>
+        <p:spPr>
+          <a:xfrm>
+            <a:off x="4670617" y="2476783"/>
+            <a:ext cx="7146172" cy="4100000"/>
+          </a:xfrm>
+          <a:prstGeom prst="rect">
+            <a:avLst/>
+          </a:prstGeom>
+        </p:spPr>
+        <p:txBody>
+          <a:bodyPr>
+            <a:normAutofit/>
+          </a:bodyPr>
+          <a:lstStyle/>
+          <a:p>
+            <a:pPr marL="0" indent="0">
+              <a:buNone/>
+            </a:pPr>
+            <a:r>
+              <a:rPr lang="es-CO">
+                <a:solidFill>
+                  <a:schemeClr val="bg1"/>
+                </a:solidFill>
+              </a:rPr>
+              <a:t>Para usar la aplicación necesitas tres cosas listas:</a:t>
+            </a:r>
+          </a:p>
+          <a:p>
+            <a:pPr marL="357188" indent="-357188">
+              <a:spcBef>
+                <a:spcPts val="600"/>
+              </a:spcBef>
+              <a:buFont typeface="+mj-lt"/>
+              <a:buAutoNum type="arabicPeriod"/>
+            </a:pPr>
+            <a:r>
+              <a:rPr lang="es-CO">
+                <a:solidFill>
+                  <a:schemeClr val="bg1"/>
+                </a:solidFill>
+              </a:rPr>
+              <a:t>El formulario de Excel diligenciado con los datos del activo, abierto y guardado.</a:t>
+            </a:r>
+          </a:p>
+          <a:p>
+            <a:pPr marL="357188" indent="-357188">
+              <a:spcBef>
+                <a:spcPts val="600"/>
+              </a:spcBef>
+              <a:buFont typeface="+mj-lt"/>
+              <a:buAutoNum type="arabicPeriod"/>
+            </a:pPr>
+            <a:r>
+              <a:rPr lang="es-CO">
+                <a:solidFill>
+                  <a:schemeClr val="bg1"/>
+                </a:solidFill>
+              </a:rPr>
+              <a:t>SAP abierto y con tu sesión ya iniciada (la aplicación no inicia sesión por ti).</a:t>
+            </a:r>
+          </a:p>
+          <a:p>
+            <a:pPr marL="357188" indent="-357188">
+              <a:spcBef>
+                <a:spcPts val="600"/>
+              </a:spcBef>
+              <a:buFont typeface="+mj-lt"/>
+              <a:buAutoNum type="arabicPeriod"/>
+            </a:pPr>
+            <a:r>
+              <a:rPr lang="es-CO">
+                <a:solidFill>
+                  <a:schemeClr val="bg1"/>
+                </a:solidFill>
+              </a:rPr>
+              <a:t>La aplicación abierta en tu computador.</a:t>
+            </a:r>
+          </a:p>
+          <a:p>
+            <a:pPr marL="0" indent="0">
+              <a:spcBef>
+                <a:spcPts val="600"/>
+              </a:spcBef>
+              <a:buNone/>
+            </a:pPr>
+            <a:r>
+              <a:rPr lang="es-CO" b="1">
+                <a:solidFill>
+                  <a:schemeClr val="bg1"/>
+                </a:solidFill>
+              </a:rPr>
+              <a:t>Mientras la aplicación trabaja con SAP, no uses el mouse ni el teclado.</a:t>
             </a:r>
           </a:p>
         </p:txBody>
@@ -9127,7 +9477,7 @@
     </p:spTree>
     <p:extLst>
       <p:ext uri="{BB962C8B-B14F-4D97-AF65-F5344CB8AC3E}">
-        <p14:creationId xmlns:p14="http://schemas.microsoft.com/office/powerpoint/2010/main" val="623546703"/>
+        <p14:creationId xmlns:p14="http://schemas.microsoft.com/office/powerpoint/2010/main" val="590287769"/>
       </p:ext>
     </p:extLst>
   </p:cSld>
@@ -9328,13 +9678,7 @@
   <p:cSld>
     <p:spTree>
       <p:nvGrpSpPr>
-        <p:cNvPr id="1" name="">
-          <a:extLst>
-            <a:ext uri="{FF2B5EF4-FFF2-40B4-BE49-F238E27FC236}">
-              <a16:creationId xmlns:a16="http://schemas.microsoft.com/office/drawing/2014/main" id="{1A689B8B-7DDE-8534-B66D-13E2691DEE8A}"/>
-            </a:ext>
-          </a:extLst>
-        </p:cNvPr>
+        <p:cNvPr id="1" name=""/>
         <p:cNvGrpSpPr/>
         <p:nvPr/>
       </p:nvGrpSpPr>
@@ -9348,10 +9692,10 @@
       </p:grpSpPr>
       <p:sp>
         <p:nvSpPr>
-          <p:cNvPr id="5" name="Título 4">
+          <p:cNvPr id="2" name="Título 1">
             <a:extLst>
               <a:ext uri="{FF2B5EF4-FFF2-40B4-BE49-F238E27FC236}">
-                <a16:creationId xmlns:a16="http://schemas.microsoft.com/office/drawing/2014/main" id="{716A16E2-6542-47AB-CB5A-AA1A42C8F968}"/>
+                <a16:creationId xmlns:a16="http://schemas.microsoft.com/office/drawing/2014/main" id="{8E015669-66ED-D51F-0B8F-226AFFBCF523}"/>
               </a:ext>
             </a:extLst>
           </p:cNvPr>
@@ -9374,17 +9718,17 @@
               <a:rPr lang="es-CO">
                 <a:latin typeface="Bariol" panose="02000506040000020003" pitchFamily="50" charset="0"/>
               </a:rPr>
-              <a:t>¿Qué puedes hacer con ella?</a:t>
-            </a:r>
-          </a:p>
-        </p:txBody>
-      </p:sp>
-      <p:sp>
-        <p:nvSpPr>
-          <p:cNvPr id="6" name="Marcador de contenido 5">
+              <a:t>Activos Fijos</a:t>
+            </a:r>
+          </a:p>
+        </p:txBody>
+      </p:sp>
+      <p:sp>
+        <p:nvSpPr>
+          <p:cNvPr id="3" name="Marcador de texto 2">
             <a:extLst>
               <a:ext uri="{FF2B5EF4-FFF2-40B4-BE49-F238E27FC236}">
-                <a16:creationId xmlns:a16="http://schemas.microsoft.com/office/drawing/2014/main" id="{CC548DBE-0DFE-E86D-5A1F-A784E6CA2790}"/>
+                <a16:creationId xmlns:a16="http://schemas.microsoft.com/office/drawing/2014/main" id="{42CAB150-398A-0BEF-B691-BF9A66542303}"/>
               </a:ext>
             </a:extLst>
           </p:cNvPr>
@@ -9392,142 +9736,30 @@
             <a:spLocks noGrp="1"/>
           </p:cNvSpPr>
           <p:nvPr>
-            <p:ph type="body" sz="quarter" idx="4294967295"/>
+            <p:ph type="body" idx="1"/>
           </p:nvPr>
         </p:nvSpPr>
-        <p:spPr>
-          <a:xfrm>
-            <a:off x="514350" y="1600000"/>
-            <a:ext cx="5650000" cy="4950000"/>
-          </a:xfrm>
-        </p:spPr>
-        <p:txBody>
-          <a:bodyPr>
-            <a:normAutofit/>
-          </a:bodyPr>
+        <p:spPr/>
+        <p:txBody>
+          <a:bodyPr/>
           <a:lstStyle/>
           <a:p>
             <a:pPr marL="0" indent="0">
-              <a:spcBef>
-                <a:spcPts val="600"/>
-              </a:spcBef>
               <a:buNone/>
             </a:pPr>
             <a:r>
-              <a:rPr lang="es-CO" sz="1800" b="1"/>
-              <a:t>Activos Fijos</a:t>
-            </a:r>
-          </a:p>
-          <a:p>
-            <a:pPr marL="274638" indent="-274638">
-              <a:spcBef>
-                <a:spcPts val="500"/>
-              </a:spcBef>
-              <a:buFont typeface="Arial"/>
-              <a:buChar char="•"/>
-            </a:pPr>
-            <a:r>
-              <a:rPr lang="es-CO" sz="1500"/>
-              <a:t>Extraer la informacion para SAP.</a:t>
-            </a:r>
-          </a:p>
-          <a:p>
-            <a:pPr marL="274638" indent="-274638">
-              <a:spcBef>
-                <a:spcPts val="500"/>
-              </a:spcBef>
-              <a:buFont typeface="Arial"/>
-              <a:buChar char="•"/>
-            </a:pPr>
-            <a:r>
-              <a:rPr lang="es-CO" sz="1500"/>
-              <a:t>Crear el activo automaticamente en SAP.</a:t>
-            </a:r>
-          </a:p>
-          <a:p>
-            <a:pPr marL="274638" indent="-274638">
-              <a:spcBef>
-                <a:spcPts val="500"/>
-              </a:spcBef>
-              <a:buFont typeface="Arial"/>
-              <a:buChar char="•"/>
-            </a:pPr>
-            <a:r>
-              <a:rPr lang="es-CO" sz="1500"/>
-              <a:t>Consultar los activos ya creados.</a:t>
-            </a:r>
-          </a:p>
-          <a:p>
-            <a:pPr marL="274638" indent="-274638">
-              <a:spcBef>
-                <a:spcPts val="500"/>
-              </a:spcBef>
-              <a:buFont typeface="Arial"/>
-              <a:buChar char="•"/>
-            </a:pPr>
-            <a:r>
-              <a:rPr lang="es-CO" sz="1500"/>
-              <a:t>Adjuntar documentos de soporte a cada activo.</a:t>
-            </a:r>
-          </a:p>
-          <a:p>
-            <a:pPr marL="0" indent="0">
-              <a:spcBef>
-                <a:spcPts val="600"/>
-              </a:spcBef>
-              <a:buNone/>
-            </a:pPr>
-            <a:r>
-              <a:rPr lang="es-CO" sz="1800" b="1"/>
-              <a:t>Control SOX</a:t>
-            </a:r>
-          </a:p>
-          <a:p>
-            <a:pPr marL="274638" indent="-274638">
-              <a:spcBef>
-                <a:spcPts val="500"/>
-              </a:spcBef>
-              <a:buFont typeface="Arial"/>
-              <a:buChar char="•"/>
-            </a:pPr>
-            <a:r>
-              <a:rPr lang="es-CO" sz="1500"/>
-              <a:t>Generar el reporte de control con sus evidencias en un solo Excel.</a:t>
-            </a:r>
-          </a:p>
-          <a:p>
-            <a:pPr marL="0" indent="0">
-              <a:spcBef>
-                <a:spcPts val="600"/>
-              </a:spcBef>
-              <a:buNone/>
-            </a:pPr>
-            <a:r>
-              <a:rPr lang="es-CO" sz="1800" b="1"/>
-              <a:t>Reportes</a:t>
-            </a:r>
-          </a:p>
-          <a:p>
-            <a:pPr marL="274638" indent="-274638">
-              <a:spcBef>
-                <a:spcPts val="500"/>
-              </a:spcBef>
-              <a:buFont typeface="Arial"/>
-              <a:buChar char="•"/>
-            </a:pPr>
-            <a:r>
-              <a:rPr lang="es-CO" sz="1500"/>
-              <a:t>Modulo reservado para nuevas funciones a futuro.</a:t>
-            </a:r>
-          </a:p>
-        </p:txBody>
-      </p:sp>
-      <p:sp>
-        <p:nvSpPr>
-          <p:cNvPr id="8" name="Marcador de número de diapositiva 7">
+              <a:rPr lang="es-CO"/>
+              <a:t>Crea activos en SAP, consulta los que se generaron y adjunta sus documentos de soporte.</a:t>
+            </a:r>
+          </a:p>
+        </p:txBody>
+      </p:sp>
+      <p:sp>
+        <p:nvSpPr>
+          <p:cNvPr id="4" name="Marcador de texto 3">
             <a:extLst>
               <a:ext uri="{FF2B5EF4-FFF2-40B4-BE49-F238E27FC236}">
-                <a16:creationId xmlns:a16="http://schemas.microsoft.com/office/drawing/2014/main" id="{DF45772F-1BFC-EC1A-DFB5-9468420C58B2}"/>
+                <a16:creationId xmlns:a16="http://schemas.microsoft.com/office/drawing/2014/main" id="{A48A5407-45D9-3659-5333-5E8867BC1B6A}"/>
               </a:ext>
             </a:extLst>
           </p:cNvPr>
@@ -9535,7 +9767,7 @@
             <a:spLocks noGrp="1"/>
           </p:cNvSpPr>
           <p:nvPr>
-            <p:ph type="sldNum" sz="quarter" idx="4"/>
+            <p:ph type="body" sz="quarter" idx="10"/>
           </p:nvPr>
         </p:nvSpPr>
         <p:spPr/>
@@ -9543,83 +9775,19 @@
           <a:bodyPr/>
           <a:lstStyle/>
           <a:p>
-            <a:fld id="{F6EB29E3-579C-284A-BB93-B47AD62E130B}" type="slidenum">
-              <a:rPr lang="es-ES_tradnl" smtClean="0"/>
-              <a:pPr/>
-              <a:t>6</a:t>
-            </a:fld>
-            <a:endParaRPr lang="es-ES_tradnl" sz="1000"/>
-          </a:p>
-        </p:txBody>
-      </p:sp>
-      <p:pic>
-        <p:nvPicPr>
-          <p:cNvPr id="11" name="Imagen 10" descr="Imagen que contiene Interfaz de usuario gráfica  El contenido generado por IA puede ser incorrecto.">
-            <a:extLst>
-              <a:ext uri="{FF2B5EF4-FFF2-40B4-BE49-F238E27FC236}">
-                <a16:creationId xmlns:a16="http://schemas.microsoft.com/office/drawing/2014/main" id="{E08CBAE9-8F59-4A66-BF92-6EB54FBC4CF6}"/>
-              </a:ext>
-            </a:extLst>
-          </p:cNvPr>
-          <p:cNvPicPr>
-            <a:picLocks noChangeAspect="1"/>
-          </p:cNvPicPr>
-          <p:nvPr/>
-        </p:nvPicPr>
-        <p:blipFill>
-          <a:blip r:embed="rId2"/>
-          <a:stretch>
-            <a:fillRect/>
-          </a:stretch>
-        </p:blipFill>
-        <p:spPr>
-          <a:xfrm flipH="1">
-            <a:off x="5982230" y="1539071"/>
-            <a:ext cx="9919503" cy="5574074"/>
-          </a:xfrm>
-          <a:prstGeom prst="rect">
-            <a:avLst/>
-          </a:prstGeom>
-        </p:spPr>
-      </p:pic>
-      <p:sp>
-        <p:nvSpPr>
-          <p:cNvPr id="13" name="Marcador de contenido 5">
-            <a:extLst>
-              <a:ext uri="{FF2B5EF4-FFF2-40B4-BE49-F238E27FC236}">
-                <a16:creationId xmlns:a16="http://schemas.microsoft.com/office/drawing/2014/main" id="{A8E9447D-30F7-EABE-AB32-0F97778CA18C}"/>
-              </a:ext>
-            </a:extLst>
-          </p:cNvPr>
-          <p:cNvSpPr txBox="1">
-            <a:spLocks/>
-          </p:cNvSpPr>
-          <p:nvPr/>
-        </p:nvSpPr>
-        <p:spPr>
-          <a:xfrm>
-            <a:off x="6300000" y="1700000"/>
-            <a:ext cx="5350000" cy="4700000"/>
-          </a:xfrm>
-          <a:prstGeom prst="rect">
-            <a:avLst/>
-          </a:prstGeom>
-        </p:spPr>
-        <p:txBody>
-          <a:bodyPr/>
-          <a:lstStyle/>
-          <a:p>
-            <a:pPr marL="0" indent="0">
-              <a:buNone/>
-            </a:pPr>
-            <a:endParaRPr lang="es-CO"/>
+            <a:r>
+              <a:rPr lang="es-CO">
+                <a:latin typeface="Bariol" panose="02000506040000020003" pitchFamily="50" charset="0"/>
+              </a:rPr>
+              <a:t>1</a:t>
+            </a:r>
           </a:p>
         </p:txBody>
       </p:sp>
     </p:spTree>
     <p:extLst>
       <p:ext uri="{BB962C8B-B14F-4D97-AF65-F5344CB8AC3E}">
-        <p14:creationId xmlns:p14="http://schemas.microsoft.com/office/powerpoint/2010/main" val="1615763616"/>
+        <p14:creationId xmlns:p14="http://schemas.microsoft.com/office/powerpoint/2010/main" val="623546703"/>
       </p:ext>
     </p:extLst>
   </p:cSld>
@@ -9781,7 +9949,7 @@
               <a:rPr lang="es-CO">
                 <a:latin typeface="Bariol" panose="02000506040000020003" pitchFamily="50" charset="0"/>
               </a:rPr>
-              <a:t>¿Qué es esta aplicación?</a:t>
+              <a:t>Paso 1 · Extraer la información</a:t>
             </a:r>
           </a:p>
         </p:txBody>
@@ -9820,7 +9988,7 @@
             </a:pPr>
             <a:r>
               <a:rPr lang="es-CO"/>
-              <a:t>Es una aplicacion para tu computador que crea y capitaliza activos fijos en SAP de forma automatica.</a:t>
+              <a:t>Entra a la tarjeta Activos Fijos y pulsa Extraer información en txt.</a:t>
             </a:r>
           </a:p>
           <a:p>
@@ -9832,7 +10000,7 @@
             </a:pPr>
             <a:r>
               <a:rPr lang="es-CO"/>
-              <a:t>En lugar de cargar la informacion a mano, pantalla por pantalla, toma los datos que preparaste en Excel y los registra en SAP por ti.</a:t>
+              <a:t>La aplicación toma los datos del formulario de Excel y los deja listos para SAP.</a:t>
             </a:r>
           </a:p>
           <a:p>
@@ -9844,7 +10012,7 @@
             </a:pPr>
             <a:r>
               <a:rPr lang="es-CO"/>
-              <a:t>Tambien genera el reporte de control SOX y te permite consultar los activos que se crearon.</a:t>
+              <a:t>Si ya existe una extracción anterior, te preguntará si deseas reemplazarla.</a:t>
             </a:r>
           </a:p>
           <a:p>
@@ -9856,7 +10024,19 @@
             </a:pPr>
             <a:r>
               <a:rPr lang="es-CO"/>
-              <a:t>Tu preparas y supervisas; la aplicacion hace el trabajo repetitivo.</a:t>
+              <a:t>Al terminar verás un mensaje con la cantidad de registros preparados.</a:t>
+            </a:r>
+          </a:p>
+          <a:p>
+            <a:pPr marL="0" indent="0">
+              <a:spcBef>
+                <a:spcPts val="600"/>
+              </a:spcBef>
+              <a:buNone/>
+            </a:pPr>
+            <a:r>
+              <a:rPr lang="es-CO" b="1"/>
+              <a:t>Recuerda guardar el Excel antes de extraer, para que los datos estén actualizados.</a:t>
             </a:r>
           </a:p>
         </p:txBody>
@@ -10029,7 +10209,7 @@
                 </a:solidFill>
                 <a:latin typeface="Bariol" panose="02000506040000020003" pitchFamily="50" charset="0"/>
               </a:rPr>
-              <a:t>Antes de empezar</a:t>
+              <a:t>Paso 2 · Crear el activo en SAP</a:t>
             </a:r>
           </a:p>
         </p:txBody>
@@ -10072,58 +10252,7 @@
                   <a:schemeClr val="bg1"/>
                 </a:solidFill>
               </a:rPr>
-              <a:t>Para usar la aplicacion necesitas tres cosas listas:</a:t>
-            </a:r>
-          </a:p>
-          <a:p>
-            <a:pPr marL="357188" indent="-357188">
-              <a:spcBef>
-                <a:spcPts val="600"/>
-              </a:spcBef>
-              <a:buFont typeface="+mj-lt"/>
-              <a:buAutoNum type="arabicPeriod"/>
-            </a:pPr>
-            <a:r>
-              <a:rPr lang="es-CO">
-                <a:solidFill>
-                  <a:schemeClr val="bg1"/>
-                </a:solidFill>
-              </a:rPr>
-              <a:t>El formulario de Excel diligenciado con los datos del activo, abierto y guardado.</a:t>
-            </a:r>
-          </a:p>
-          <a:p>
-            <a:pPr marL="357188" indent="-357188">
-              <a:spcBef>
-                <a:spcPts val="600"/>
-              </a:spcBef>
-              <a:buFont typeface="+mj-lt"/>
-              <a:buAutoNum type="arabicPeriod"/>
-            </a:pPr>
-            <a:r>
-              <a:rPr lang="es-CO">
-                <a:solidFill>
-                  <a:schemeClr val="bg1"/>
-                </a:solidFill>
-              </a:rPr>
-              <a:t>SAP abierto y con tu sesion ya iniciada (la aplicacion no inicia sesion por ti).</a:t>
-            </a:r>
-          </a:p>
-          <a:p>
-            <a:pPr marL="357188" indent="-357188">
-              <a:spcBef>
-                <a:spcPts val="600"/>
-              </a:spcBef>
-              <a:buFont typeface="+mj-lt"/>
-              <a:buAutoNum type="arabicPeriod"/>
-            </a:pPr>
-            <a:r>
-              <a:rPr lang="es-CO">
-                <a:solidFill>
-                  <a:schemeClr val="bg1"/>
-                </a:solidFill>
-              </a:rPr>
-              <a:t>La aplicacion abierta en tu computador.</a:t>
+              <a:t>Con SAP abierto, pulsa Creación de Activo.</a:t>
             </a:r>
           </a:p>
           <a:p>
@@ -10134,12 +10263,44 @@
               <a:buNone/>
             </a:pPr>
             <a:r>
+              <a:rPr lang="es-CO">
+                <a:solidFill>
+                  <a:schemeClr val="bg1"/>
+                </a:solidFill>
+              </a:rPr>
+              <a:t>Este botón se habilita solo cuando ya hay una extracción lista.</a:t>
+            </a:r>
+          </a:p>
+          <a:p>
+            <a:pPr marL="0" indent="0">
+              <a:spcBef>
+                <a:spcPts val="600"/>
+              </a:spcBef>
+              <a:buNone/>
+            </a:pPr>
+            <a:r>
+              <a:rPr lang="es-CO">
+                <a:solidFill>
+                  <a:schemeClr val="bg1"/>
+                </a:solidFill>
+              </a:rPr>
+              <a:t>La aplicación pedirá confirmación y luego cargará la información en SAP automáticamente, paso a paso. Verás el avance en pantalla.</a:t>
+            </a:r>
+          </a:p>
+          <a:p>
+            <a:pPr marL="0" indent="0">
+              <a:spcBef>
+                <a:spcPts val="600"/>
+              </a:spcBef>
+              <a:buNone/>
+            </a:pPr>
+            <a:r>
               <a:rPr lang="es-CO" b="1">
                 <a:solidFill>
                   <a:schemeClr val="bg1"/>
                 </a:solidFill>
               </a:rPr>
-              <a:t>Mientras la aplicacion trabaja con SAP, no uses el mouse ni el teclado.</a:t>
+              <a:t>No toques el equipo mientras trabaja. Al finalizar, los activos quedan creados en SAP.</a:t>
             </a:r>
           </a:p>
         </p:txBody>
@@ -10174,13 +10335,7 @@
   <p:cSld>
     <p:spTree>
       <p:nvGrpSpPr>
-        <p:cNvPr id="1" name="">
-          <a:extLst>
-            <a:ext uri="{FF2B5EF4-FFF2-40B4-BE49-F238E27FC236}">
-              <a16:creationId xmlns:a16="http://schemas.microsoft.com/office/drawing/2014/main" id="{67DBDDD0-4560-6ED3-0BB1-0B3EE4624E1C}"/>
-            </a:ext>
-          </a:extLst>
-        </p:cNvPr>
+        <p:cNvPr id="1" name=""/>
         <p:cNvGrpSpPr/>
         <p:nvPr/>
       </p:nvGrpSpPr>
@@ -10197,7 +10352,7 @@
           <p:cNvPr id="2" name="Marcador de número de diapositiva 1">
             <a:extLst>
               <a:ext uri="{FF2B5EF4-FFF2-40B4-BE49-F238E27FC236}">
-                <a16:creationId xmlns:a16="http://schemas.microsoft.com/office/drawing/2014/main" id="{007230E2-C3A4-E5CD-B8D8-DF729C099ABE}"/>
+                <a16:creationId xmlns:a16="http://schemas.microsoft.com/office/drawing/2014/main" id="{C71B1FE5-49E8-305C-67AA-2EEDB30201D0}"/>
               </a:ext>
             </a:extLst>
           </p:cNvPr>
@@ -10224,10 +10379,10 @@
       </p:sp>
       <p:pic>
         <p:nvPicPr>
-          <p:cNvPr id="6" name="Imagen 5" descr="Una caricatura de una persona  El contenido generado por IA puede ser incorrecto.">
+          <p:cNvPr id="6" name="Imagen 5" descr="Imagen que contiene Icono  El contenido generado por IA puede ser incorrecto.">
             <a:extLst>
               <a:ext uri="{FF2B5EF4-FFF2-40B4-BE49-F238E27FC236}">
-                <a16:creationId xmlns:a16="http://schemas.microsoft.com/office/drawing/2014/main" id="{05E8414B-97B1-D3B1-7671-4AFAAB8B13F9}"/>
+                <a16:creationId xmlns:a16="http://schemas.microsoft.com/office/drawing/2014/main" id="{E4B9A577-EBFE-9667-84DD-2AFE7364992F}"/>
               </a:ext>
             </a:extLst>
           </p:cNvPr>
@@ -10244,7 +10399,7 @@
         </p:blipFill>
         <p:spPr>
           <a:xfrm>
-            <a:off x="-334963" y="1043224"/>
+            <a:off x="1" y="0"/>
             <a:ext cx="12191999" cy="6858000"/>
           </a:xfrm>
           <a:prstGeom prst="rect">
@@ -10254,10 +10409,10 @@
       </p:pic>
       <p:pic>
         <p:nvPicPr>
-          <p:cNvPr id="4" name="Imagen 3" descr="Logotipo  El contenido generado por IA puede ser incorrecto.">
+          <p:cNvPr id="17" name="Imagen 16" descr="Imagen que contiene Logotipo  El contenido generado por IA puede ser incorrecto.">
             <a:extLst>
               <a:ext uri="{FF2B5EF4-FFF2-40B4-BE49-F238E27FC236}">
-                <a16:creationId xmlns:a16="http://schemas.microsoft.com/office/drawing/2014/main" id="{ADA3B400-2E63-AB6A-B1D6-D02BD6A90E9E}"/>
+                <a16:creationId xmlns:a16="http://schemas.microsoft.com/office/drawing/2014/main" id="{5D21599D-3D35-3676-8EF4-70E5A2CA8A2C}"/>
               </a:ext>
             </a:extLst>
           </p:cNvPr>
@@ -10274,8 +10429,8 @@
         </p:blipFill>
         <p:spPr>
           <a:xfrm>
-            <a:off x="10804414" y="333378"/>
-            <a:ext cx="1053147" cy="610520"/>
+            <a:off x="10804414" y="333377"/>
+            <a:ext cx="1052621" cy="610520"/>
           </a:xfrm>
           <a:prstGeom prst="rect">
             <a:avLst/>
@@ -10284,10 +10439,48 @@
       </p:pic>
       <p:sp>
         <p:nvSpPr>
-          <p:cNvPr id="9" name="Título 1">
+          <p:cNvPr id="3" name="Título 1">
             <a:extLst>
               <a:ext uri="{FF2B5EF4-FFF2-40B4-BE49-F238E27FC236}">
-                <a16:creationId xmlns:a16="http://schemas.microsoft.com/office/drawing/2014/main" id="{CADD0DD5-CBD6-33C9-F773-B53B07DCDDFE}"/>
+                <a16:creationId xmlns:a16="http://schemas.microsoft.com/office/drawing/2014/main" id="{2AFF411C-EAE9-D636-A7E7-953F8AF03868}"/>
+              </a:ext>
+            </a:extLst>
+          </p:cNvPr>
+          <p:cNvSpPr>
+            <a:spLocks noGrp="1"/>
+          </p:cNvSpPr>
+          <p:nvPr>
+            <p:ph type="title"/>
+          </p:nvPr>
+        </p:nvSpPr>
+        <p:spPr>
+          <a:xfrm>
+            <a:off x="949651" y="300000"/>
+            <a:ext cx="9200000" cy="1150000"/>
+          </a:xfrm>
+        </p:spPr>
+        <p:txBody>
+          <a:bodyPr/>
+          <a:lstStyle/>
+          <a:p>
+            <a:pPr marL="0" indent="0">
+              <a:buNone/>
+            </a:pPr>
+            <a:r>
+              <a:rPr lang="es-CO">
+                <a:latin typeface="Bariol" panose="02000506040000020003" pitchFamily="50" charset="0"/>
+              </a:rPr>
+              <a:t>Paso 3 · Consultar los activos creados</a:t>
+            </a:r>
+          </a:p>
+        </p:txBody>
+      </p:sp>
+      <p:sp>
+        <p:nvSpPr>
+          <p:cNvPr id="4" name="Marcador de texto 2">
+            <a:extLst>
+              <a:ext uri="{FF2B5EF4-FFF2-40B4-BE49-F238E27FC236}">
+                <a16:creationId xmlns:a16="http://schemas.microsoft.com/office/drawing/2014/main" id="{D88E0A4A-9D10-5EF8-47B7-D7EA37060660}"/>
               </a:ext>
             </a:extLst>
           </p:cNvPr>
@@ -10298,50 +10491,8 @@
         </p:nvSpPr>
         <p:spPr>
           <a:xfrm>
-            <a:off x="1022906" y="250000"/>
-            <a:ext cx="9200000" cy="1050000"/>
-          </a:xfrm>
-          <a:prstGeom prst="rect">
-            <a:avLst/>
-          </a:prstGeom>
-        </p:spPr>
-        <p:txBody>
-          <a:bodyPr/>
-          <a:lstStyle/>
-          <a:p>
-            <a:pPr marL="0" indent="0">
-              <a:buNone/>
-            </a:pPr>
-            <a:r>
-              <a:rPr lang="es-CO">
-                <a:solidFill>
-                  <a:srgbClr val="1A3A6C"/>
-                </a:solidFill>
-                <a:latin typeface="Bariol" panose="02000506040000020003" pitchFamily="50" charset="0"/>
-              </a:rPr>
-              <a:t>Consejos y solución de problemas</a:t>
-            </a:r>
-          </a:p>
-        </p:txBody>
-      </p:sp>
-      <p:sp>
-        <p:nvSpPr>
-          <p:cNvPr id="10" name="Subtítulo 2">
-            <a:extLst>
-              <a:ext uri="{FF2B5EF4-FFF2-40B4-BE49-F238E27FC236}">
-                <a16:creationId xmlns:a16="http://schemas.microsoft.com/office/drawing/2014/main" id="{4CD61A4D-B0ED-70E5-B2B0-CDA5CB277D91}"/>
-              </a:ext>
-            </a:extLst>
-          </p:cNvPr>
-          <p:cNvSpPr txBox="1">
-            <a:spLocks/>
-          </p:cNvSpPr>
-          <p:nvPr/>
-        </p:nvSpPr>
-        <p:spPr>
-          <a:xfrm>
-            <a:off x="1022906" y="1480000"/>
-            <a:ext cx="9000000" cy="4900000"/>
+            <a:off x="949651" y="1620000"/>
+            <a:ext cx="7650000" cy="4600000"/>
           </a:xfrm>
           <a:prstGeom prst="rect">
             <a:avLst/>
@@ -10353,200 +10504,44 @@
           </a:bodyPr>
           <a:lstStyle/>
           <a:p>
-            <a:pPr marL="274638" indent="-274638">
+            <a:pPr marL="0" indent="0">
+              <a:buNone/>
+            </a:pPr>
+            <a:r>
+              <a:rPr lang="es-CO"/>
+              <a:t>Pulsa Extraer Activos Creados, escribe tu usuario de SAP y pulsa Ejecutar.</a:t>
+            </a:r>
+          </a:p>
+          <a:p>
+            <a:pPr marL="0" indent="0">
               <a:spcBef>
-                <a:spcPts val="500"/>
+                <a:spcPts val="600"/>
               </a:spcBef>
-              <a:buFont typeface="Arial"/>
-              <a:buChar char="•"/>
+              <a:buNone/>
             </a:pPr>
             <a:r>
-              <a:rPr lang="es-CO" sz="1600">
-                <a:solidFill>
-                  <a:schemeClr val="bg1"/>
-                </a:solidFill>
-              </a:rPr>
-              <a:t>Si el boton Creacion de Activo esta apagado, primero extrae la informacion en txt.</a:t>
-            </a:r>
-          </a:p>
-          <a:p>
-            <a:pPr marL="274638" indent="-274638">
+              <a:rPr lang="es-CO"/>
+              <a:t>La aplicación consulta en SAP los activos que se crearon y genera un archivo de Excel con el listado y el número de cada activo.</a:t>
+            </a:r>
+          </a:p>
+          <a:p>
+            <a:pPr marL="0" indent="0">
               <a:spcBef>
-                <a:spcPts val="500"/>
+                <a:spcPts val="600"/>
               </a:spcBef>
-              <a:buFont typeface="Arial"/>
-              <a:buChar char="•"/>
+              <a:buNone/>
             </a:pPr>
             <a:r>
-              <a:rPr lang="es-CO" sz="1600">
-                <a:solidFill>
-                  <a:schemeClr val="bg1"/>
-                </a:solidFill>
-              </a:rPr>
-              <a:t>Si aparece que no encuentra SAP, verifica que SAP este abierto y con tu sesion iniciada.</a:t>
-            </a:r>
-          </a:p>
-          <a:p>
-            <a:pPr marL="274638" indent="-274638">
-              <a:spcBef>
-                <a:spcPts val="500"/>
-              </a:spcBef>
-              <a:buFont typeface="Arial"/>
-              <a:buChar char="•"/>
-            </a:pPr>
-            <a:r>
-              <a:rPr lang="es-CO" sz="1600">
-                <a:solidFill>
-                  <a:schemeClr val="bg1"/>
-                </a:solidFill>
-              </a:rPr>
-              <a:t>Guarda siempre el Excel antes de extraer la informacion.</a:t>
-            </a:r>
-          </a:p>
-          <a:p>
-            <a:pPr marL="274638" indent="-274638">
-              <a:spcBef>
-                <a:spcPts val="500"/>
-              </a:spcBef>
-              <a:buFont typeface="Arial"/>
-              <a:buChar char="•"/>
-            </a:pPr>
-            <a:r>
-              <a:rPr lang="es-CO" sz="1600">
-                <a:solidFill>
-                  <a:schemeClr val="bg1"/>
-                </a:solidFill>
-              </a:rPr>
-              <a:t>No uses el equipo mientras la aplicacion trabaja con SAP.</a:t>
-            </a:r>
-          </a:p>
-          <a:p>
-            <a:pPr marL="274638" indent="-274638">
-              <a:spcBef>
-                <a:spcPts val="500"/>
-              </a:spcBef>
-              <a:buFont typeface="Arial"/>
-              <a:buChar char="•"/>
-            </a:pPr>
-            <a:r>
-              <a:rPr lang="es-CO" sz="1600">
-                <a:solidFill>
-                  <a:schemeClr val="bg1"/>
-                </a:solidFill>
-              </a:rPr>
-              <a:t>Revisa el listado de activos creados para confirmar el resultado.</a:t>
-            </a:r>
-          </a:p>
-        </p:txBody>
-      </p:sp>
-      <p:sp>
-        <p:nvSpPr>
-          <p:cNvPr id="12" name="Título 11">
-            <a:extLst>
-              <a:ext uri="{FF2B5EF4-FFF2-40B4-BE49-F238E27FC236}">
-                <a16:creationId xmlns:a16="http://schemas.microsoft.com/office/drawing/2014/main" id="{83E2D80B-D749-946A-725D-4991F6E76397}"/>
-              </a:ext>
-            </a:extLst>
-          </p:cNvPr>
-          <p:cNvSpPr>
-            <a:spLocks noGrp="1"/>
-          </p:cNvSpPr>
-          <p:nvPr>
-            <p:ph type="title"/>
-          </p:nvPr>
-        </p:nvSpPr>
-        <p:spPr/>
-        <p:txBody>
-          <a:bodyPr/>
-          <a:lstStyle/>
-          <a:p>
-            <a:r>
               <a:rPr lang="es-CO"/>
-              <a:t>¿</a:t>
-            </a:r>
-          </a:p>
-        </p:txBody>
-      </p:sp>
-      <p:sp>
-        <p:nvSpPr>
-          <p:cNvPr id="13" name="Título 1">
-            <a:extLst>
-              <a:ext uri="{FF2B5EF4-FFF2-40B4-BE49-F238E27FC236}">
-                <a16:creationId xmlns:a16="http://schemas.microsoft.com/office/drawing/2014/main" id="{F68C82FE-7ECA-ACC8-8DF3-1C5639984A2D}"/>
-              </a:ext>
-            </a:extLst>
-          </p:cNvPr>
-          <p:cNvSpPr txBox="1">
-            <a:spLocks/>
-          </p:cNvSpPr>
-          <p:nvPr/>
-        </p:nvSpPr>
-        <p:spPr>
-          <a:xfrm>
-            <a:off x="9033477" y="432704"/>
-            <a:ext cx="8905114" cy="2852737"/>
-          </a:xfrm>
-          <a:prstGeom prst="rect">
-            <a:avLst/>
-          </a:prstGeom>
-        </p:spPr>
-        <p:txBody>
-          <a:bodyPr/>
-          <a:lstStyle/>
-          <a:p>
-            <a:pPr marL="0" indent="0">
-              <a:buNone/>
-            </a:pPr>
-            <a:r>
-              <a:rPr lang="es-CO">
-                <a:solidFill>
-                  <a:schemeClr val="bg1"/>
-                </a:solidFill>
-                <a:latin typeface="Bariol" panose="02000506040000020003" pitchFamily="50" charset="0"/>
-              </a:rPr>
-              <a:t/>
-            </a:r>
-          </a:p>
-        </p:txBody>
-      </p:sp>
-      <p:sp>
-        <p:nvSpPr>
-          <p:cNvPr id="14" name="Subtítulo 2">
-            <a:extLst>
-              <a:ext uri="{FF2B5EF4-FFF2-40B4-BE49-F238E27FC236}">
-                <a16:creationId xmlns:a16="http://schemas.microsoft.com/office/drawing/2014/main" id="{75646921-4C86-4774-8050-57C2CB8E56C6}"/>
-              </a:ext>
-            </a:extLst>
-          </p:cNvPr>
-          <p:cNvSpPr txBox="1">
-            <a:spLocks/>
-          </p:cNvSpPr>
-          <p:nvPr/>
-        </p:nvSpPr>
-        <p:spPr>
-          <a:xfrm>
-            <a:off x="1022906" y="3700000"/>
-            <a:ext cx="7146172" cy="2200000"/>
-          </a:xfrm>
-          <a:prstGeom prst="rect">
-            <a:avLst/>
-          </a:prstGeom>
-        </p:spPr>
-        <p:txBody>
-          <a:bodyPr/>
-          <a:lstStyle/>
-          <a:p>
-            <a:pPr marL="0" indent="0">
-              <a:buNone/>
-            </a:pPr>
-            <a:endParaRPr lang="es-CO"/>
+              <a:t>Es la forma rápida de confirmar que se registró y tener el soporte a la mano.</a:t>
+            </a:r>
           </a:p>
         </p:txBody>
       </p:sp>
     </p:spTree>
     <p:extLst>
       <p:ext uri="{BB962C8B-B14F-4D97-AF65-F5344CB8AC3E}">
-        <p14:creationId xmlns:p14="http://schemas.microsoft.com/office/powerpoint/2010/main" val="332823668"/>
+        <p14:creationId xmlns:p14="http://schemas.microsoft.com/office/powerpoint/2010/main" val="4030836509"/>
       </p:ext>
     </p:extLst>
   </p:cSld>
@@ -11125,6 +11120,17 @@
 </file>
 
 <file path=customXml/item1.xml><?xml version="1.0" encoding="utf-8"?>
+<p:properties xmlns:p="http://schemas.microsoft.com/office/2006/metadata/properties" xmlns:xsi="http://www.w3.org/2001/XMLSchema-instance" xmlns:pc="http://schemas.microsoft.com/office/infopath/2007/PartnerControls">
+  <documentManagement>
+    <TaxCatchAll xmlns="911117af-2ff5-43c3-80ba-e257cd6892d3" xsi:nil="true"/>
+    <lcf76f155ced4ddcb4097134ff3c332f xmlns="70133179-21cc-423d-b28f-7c99bea0c6de">
+      <Terms xmlns="http://schemas.microsoft.com/office/infopath/2007/PartnerControls"/>
+    </lcf76f155ced4ddcb4097134ff3c332f>
+  </documentManagement>
+</p:properties>
+</file>
+
+<file path=customXml/item2.xml><?xml version="1.0" encoding="utf-8"?>
 <ct:contentTypeSchema xmlns:ct="http://schemas.microsoft.com/office/2006/metadata/contentType" xmlns:ma="http://schemas.microsoft.com/office/2006/metadata/properties/metaAttributes" ct:_="" ma:_="" ma:contentTypeName="Documento" ma:contentTypeID="0x0101002F281D2A0C797E469927A035E6C5D5ED" ma:contentTypeVersion="11" ma:contentTypeDescription="Crear nuevo documento." ma:contentTypeScope="" ma:versionID="5e9392cfd17e969048d27e3af2b177cd">
   <xsd:schema xmlns:xsd="http://www.w3.org/2001/XMLSchema" xmlns:xs="http://www.w3.org/2001/XMLSchema" xmlns:p="http://schemas.microsoft.com/office/2006/metadata/properties" xmlns:ns2="70133179-21cc-423d-b28f-7c99bea0c6de" xmlns:ns3="911117af-2ff5-43c3-80ba-e257cd6892d3" targetNamespace="http://schemas.microsoft.com/office/2006/metadata/properties" ma:root="true" ma:fieldsID="f2c37b903ba9f93506a6a0de95430801" ns2:_="" ns3:_="">
     <xsd:import namespace="70133179-21cc-423d-b28f-7c99bea0c6de"/>
@@ -11319,17 +11325,6 @@
 </ct:contentTypeSchema>
 </file>
 
-<file path=customXml/item2.xml><?xml version="1.0" encoding="utf-8"?>
-<p:properties xmlns:p="http://schemas.microsoft.com/office/2006/metadata/properties" xmlns:xsi="http://www.w3.org/2001/XMLSchema-instance" xmlns:pc="http://schemas.microsoft.com/office/infopath/2007/PartnerControls">
-  <documentManagement>
-    <TaxCatchAll xmlns="911117af-2ff5-43c3-80ba-e257cd6892d3" xsi:nil="true"/>
-    <lcf76f155ced4ddcb4097134ff3c332f xmlns="70133179-21cc-423d-b28f-7c99bea0c6de">
-      <Terms xmlns="http://schemas.microsoft.com/office/infopath/2007/PartnerControls"/>
-    </lcf76f155ced4ddcb4097134ff3c332f>
-  </documentManagement>
-</p:properties>
-</file>
-
 <file path=customXml/item3.xml><?xml version="1.0" encoding="utf-8"?>
 <?mso-contentType ?>
 <FormTemplates xmlns="http://schemas.microsoft.com/sharepoint/v3/contenttype/forms">
@@ -11340,6 +11335,23 @@
 </file>
 
 <file path=customXml/itemProps1.xml><?xml version="1.0" encoding="utf-8"?>
+<ds:datastoreItem xmlns:ds="http://schemas.openxmlformats.org/officeDocument/2006/customXml" ds:itemID="{EE307EF8-3B7F-4C93-B652-5345B6EF0DCA}">
+  <ds:schemaRefs>
+    <ds:schemaRef ds:uri="70133179-21cc-423d-b28f-7c99bea0c6de"/>
+    <ds:schemaRef ds:uri="911117af-2ff5-43c3-80ba-e257cd6892d3"/>
+    <ds:schemaRef ds:uri="http://purl.org/dc/dcmitype/"/>
+    <ds:schemaRef ds:uri="http://purl.org/dc/elements/1.1/"/>
+    <ds:schemaRef ds:uri="http://purl.org/dc/terms/"/>
+    <ds:schemaRef ds:uri="http://schemas.microsoft.com/office/2006/documentManagement/types"/>
+    <ds:schemaRef ds:uri="http://schemas.microsoft.com/office/2006/metadata/properties"/>
+    <ds:schemaRef ds:uri="http://schemas.microsoft.com/office/infopath/2007/PartnerControls"/>
+    <ds:schemaRef ds:uri="http://schemas.openxmlformats.org/package/2006/metadata/core-properties"/>
+    <ds:schemaRef ds:uri="http://www.w3.org/XML/1998/namespace"/>
+  </ds:schemaRefs>
+</ds:datastoreItem>
+</file>
+
+<file path=customXml/itemProps2.xml><?xml version="1.0" encoding="utf-8"?>
 <ds:datastoreItem xmlns:ds="http://schemas.openxmlformats.org/officeDocument/2006/customXml" ds:itemID="{FE7D374C-C355-4214-BDC3-A4459599B31F}">
   <ds:schemaRefs>
     <ds:schemaRef ds:uri="70133179-21cc-423d-b28f-7c99bea0c6de"/>
@@ -11358,23 +11370,6 @@
 </ds:datastoreItem>
 </file>
 
-<file path=customXml/itemProps2.xml><?xml version="1.0" encoding="utf-8"?>
-<ds:datastoreItem xmlns:ds="http://schemas.openxmlformats.org/officeDocument/2006/customXml" ds:itemID="{EE307EF8-3B7F-4C93-B652-5345B6EF0DCA}">
-  <ds:schemaRefs>
-    <ds:schemaRef ds:uri="70133179-21cc-423d-b28f-7c99bea0c6de"/>
-    <ds:schemaRef ds:uri="911117af-2ff5-43c3-80ba-e257cd6892d3"/>
-    <ds:schemaRef ds:uri="http://purl.org/dc/dcmitype/"/>
-    <ds:schemaRef ds:uri="http://purl.org/dc/elements/1.1/"/>
-    <ds:schemaRef ds:uri="http://purl.org/dc/terms/"/>
-    <ds:schemaRef ds:uri="http://schemas.microsoft.com/office/2006/documentManagement/types"/>
-    <ds:schemaRef ds:uri="http://schemas.microsoft.com/office/2006/metadata/properties"/>
-    <ds:schemaRef ds:uri="http://schemas.microsoft.com/office/infopath/2007/PartnerControls"/>
-    <ds:schemaRef ds:uri="http://schemas.openxmlformats.org/package/2006/metadata/core-properties"/>
-    <ds:schemaRef ds:uri="http://www.w3.org/XML/1998/namespace"/>
-  </ds:schemaRefs>
-</ds:datastoreItem>
-</file>
-
 <file path=customXml/itemProps3.xml><?xml version="1.0" encoding="utf-8"?>
 <ds:datastoreItem xmlns:ds="http://schemas.openxmlformats.org/officeDocument/2006/customXml" ds:itemID="{0DD5BF9A-35CF-4BCC-B408-A8D33CE09FBE}">
   <ds:schemaRefs>
